--- a/course_information/COURSE_OUTLINE_10_WEEKS.pptx
+++ b/course_information/COURSE_OUTLINE_10_WEEKS.pptx
@@ -5,7 +5,7 @@
     <p:sldMasterId id="2147483660" r:id="rId1"/>
   </p:sldMasterIdLst>
   <p:notesMasterIdLst>
-    <p:notesMasterId r:id="rId48"/>
+    <p:notesMasterId r:id="rId49"/>
   </p:notesMasterIdLst>
   <p:sldIdLst>
     <p:sldId id="256" r:id="rId2"/>
@@ -34,26 +34,27 @@
     <p:sldId id="282" r:id="rId25"/>
     <p:sldId id="273" r:id="rId26"/>
     <p:sldId id="284" r:id="rId27"/>
-    <p:sldId id="283" r:id="rId28"/>
-    <p:sldId id="268" r:id="rId29"/>
-    <p:sldId id="264" r:id="rId30"/>
-    <p:sldId id="269" r:id="rId31"/>
-    <p:sldId id="270" r:id="rId32"/>
-    <p:sldId id="274" r:id="rId33"/>
-    <p:sldId id="285" r:id="rId34"/>
-    <p:sldId id="286" r:id="rId35"/>
-    <p:sldId id="301" r:id="rId36"/>
-    <p:sldId id="294" r:id="rId37"/>
-    <p:sldId id="295" r:id="rId38"/>
-    <p:sldId id="296" r:id="rId39"/>
-    <p:sldId id="297" r:id="rId40"/>
-    <p:sldId id="298" r:id="rId41"/>
-    <p:sldId id="299" r:id="rId42"/>
-    <p:sldId id="300" r:id="rId43"/>
-    <p:sldId id="276" r:id="rId44"/>
-    <p:sldId id="266" r:id="rId45"/>
-    <p:sldId id="303" r:id="rId46"/>
-    <p:sldId id="267" r:id="rId47"/>
+    <p:sldId id="304" r:id="rId28"/>
+    <p:sldId id="283" r:id="rId29"/>
+    <p:sldId id="268" r:id="rId30"/>
+    <p:sldId id="264" r:id="rId31"/>
+    <p:sldId id="269" r:id="rId32"/>
+    <p:sldId id="270" r:id="rId33"/>
+    <p:sldId id="274" r:id="rId34"/>
+    <p:sldId id="285" r:id="rId35"/>
+    <p:sldId id="286" r:id="rId36"/>
+    <p:sldId id="301" r:id="rId37"/>
+    <p:sldId id="294" r:id="rId38"/>
+    <p:sldId id="295" r:id="rId39"/>
+    <p:sldId id="296" r:id="rId40"/>
+    <p:sldId id="297" r:id="rId41"/>
+    <p:sldId id="298" r:id="rId42"/>
+    <p:sldId id="299" r:id="rId43"/>
+    <p:sldId id="300" r:id="rId44"/>
+    <p:sldId id="276" r:id="rId45"/>
+    <p:sldId id="266" r:id="rId46"/>
+    <p:sldId id="303" r:id="rId47"/>
+    <p:sldId id="267" r:id="rId48"/>
   </p:sldIdLst>
   <p:sldSz cx="12192000" cy="6858000"/>
   <p:notesSz cx="6858000" cy="9144000"/>
@@ -7810,13 +7811,8 @@
             <a:pPr algn="ctr"/>
             <a:r>
               <a:rPr lang="en-US" sz="2400" dirty="0"/>
-              <a:t>RDD/</a:t>
-            </a:r>
-            <a:r>
-              <a:rPr lang="en-US" sz="2400" dirty="0" err="1"/>
-              <a:t>DataFrame</a:t>
-            </a:r>
-            <a:endParaRPr lang="en-US" sz="2400" dirty="0"/>
+              <a:t>RDD/DataFrame</a:t>
+            </a:r>
           </a:p>
         </p:txBody>
       </p:sp>
@@ -16963,6 +16959,452 @@
         <p:cNvPr id="1" name="">
           <a:extLst>
             <a:ext uri="{FF2B5EF4-FFF2-40B4-BE49-F238E27FC236}">
+              <a16:creationId xmlns:a16="http://schemas.microsoft.com/office/drawing/2014/main" id="{B89E7521-4FD6-B136-9086-A0DF13E1E24C}"/>
+            </a:ext>
+          </a:extLst>
+        </p:cNvPr>
+        <p:cNvGrpSpPr/>
+        <p:nvPr/>
+      </p:nvGrpSpPr>
+      <p:grpSpPr>
+        <a:xfrm>
+          <a:off x="0" y="0"/>
+          <a:ext cx="0" cy="0"/>
+          <a:chOff x="0" y="0"/>
+          <a:chExt cx="0" cy="0"/>
+        </a:xfrm>
+      </p:grpSpPr>
+      <p:sp>
+        <p:nvSpPr>
+          <p:cNvPr id="2" name="Title 1">
+            <a:extLst>
+              <a:ext uri="{FF2B5EF4-FFF2-40B4-BE49-F238E27FC236}">
+                <a16:creationId xmlns:a16="http://schemas.microsoft.com/office/drawing/2014/main" id="{9CCD7DD3-AA9E-BBCC-D488-F7183ADC6ED7}"/>
+              </a:ext>
+            </a:extLst>
+          </p:cNvPr>
+          <p:cNvSpPr>
+            <a:spLocks noGrp="1"/>
+          </p:cNvSpPr>
+          <p:nvPr>
+            <p:ph type="ctrTitle"/>
+          </p:nvPr>
+        </p:nvSpPr>
+        <p:spPr>
+          <a:xfrm>
+            <a:off x="1524000" y="573742"/>
+            <a:ext cx="9144000" cy="528918"/>
+          </a:xfrm>
+        </p:spPr>
+        <p:txBody>
+          <a:bodyPr>
+            <a:normAutofit fontScale="90000"/>
+          </a:bodyPr>
+          <a:lstStyle/>
+          <a:p>
+            <a:r>
+              <a:rPr lang="en-US" sz="4000" dirty="0">
+                <a:solidFill>
+                  <a:srgbClr val="00B050"/>
+                </a:solidFill>
+              </a:rPr>
+              <a:t>Spark Run Modes</a:t>
+            </a:r>
+            <a:r>
+              <a:rPr lang="en-US" dirty="0">
+                <a:solidFill>
+                  <a:srgbClr val="00B050"/>
+                </a:solidFill>
+              </a:rPr>
+              <a:t>: </a:t>
+            </a:r>
+            <a:r>
+              <a:rPr lang="en-US" sz="3100" dirty="0"/>
+              <a:t>Local Single Machine or Cluster</a:t>
+            </a:r>
+            <a:endParaRPr lang="en-US" dirty="0"/>
+          </a:p>
+        </p:txBody>
+      </p:sp>
+      <p:sp>
+        <p:nvSpPr>
+          <p:cNvPr id="3" name="Subtitle 2">
+            <a:extLst>
+              <a:ext uri="{FF2B5EF4-FFF2-40B4-BE49-F238E27FC236}">
+                <a16:creationId xmlns:a16="http://schemas.microsoft.com/office/drawing/2014/main" id="{BAC81B28-F997-2557-1F48-41757570E305}"/>
+              </a:ext>
+            </a:extLst>
+          </p:cNvPr>
+          <p:cNvSpPr>
+            <a:spLocks noGrp="1"/>
+          </p:cNvSpPr>
+          <p:nvPr>
+            <p:ph type="subTitle" idx="1"/>
+          </p:nvPr>
+        </p:nvSpPr>
+        <p:spPr>
+          <a:xfrm>
+            <a:off x="1524001" y="1102660"/>
+            <a:ext cx="8148918" cy="5181599"/>
+          </a:xfrm>
+        </p:spPr>
+        <p:txBody>
+          <a:bodyPr>
+            <a:normAutofit fontScale="85000" lnSpcReduction="10000"/>
+          </a:bodyPr>
+          <a:lstStyle/>
+          <a:p>
+            <a:r>
+              <a:rPr lang="en-US" sz="2800" dirty="0"/>
+              <a:t>The code that runs on a single machine is the same code which runs it in a cluster of 100's of nodes: In </a:t>
+            </a:r>
+            <a:r>
+              <a:rPr lang="en-US" sz="2800" dirty="0">
+                <a:hlinkClick r:id="rId2"/>
+              </a:rPr>
+              <a:t>Spark</a:t>
+            </a:r>
+            <a:r>
+              <a:rPr lang="en-US" sz="2800" dirty="0"/>
+              <a:t>, this concept is expressed as: </a:t>
+            </a:r>
+          </a:p>
+          <a:p>
+            <a:r>
+              <a:rPr lang="en-US" dirty="0"/>
+              <a:t>"</a:t>
+            </a:r>
+            <a:r>
+              <a:rPr lang="en-US" dirty="0">
+                <a:solidFill>
+                  <a:srgbClr val="00B0F0"/>
+                </a:solidFill>
+              </a:rPr>
+              <a:t>The exact same PySpark code runs seamlessly on a single machine or scales out to a cluster of 100s of nodes </a:t>
+            </a:r>
+            <a:r>
+              <a:rPr lang="en-US" u="sng" dirty="0">
+                <a:solidFill>
+                  <a:srgbClr val="00B0F0"/>
+                </a:solidFill>
+              </a:rPr>
+              <a:t>without changing a single line of logic.</a:t>
+            </a:r>
+            <a:r>
+              <a:rPr lang="en-US" u="sng" dirty="0"/>
+              <a:t>”</a:t>
+            </a:r>
+          </a:p>
+          <a:p>
+            <a:endParaRPr lang="en-US" sz="3400" b="1" dirty="0">
+              <a:solidFill>
+                <a:srgbClr val="00B050"/>
+              </a:solidFill>
+            </a:endParaRPr>
+          </a:p>
+          <a:p>
+            <a:r>
+              <a:rPr lang="en-US" sz="3400" b="1" dirty="0">
+                <a:solidFill>
+                  <a:srgbClr val="00B050"/>
+                </a:solidFill>
+              </a:rPr>
+              <a:t># Write Once. Run at Any Scale.</a:t>
+            </a:r>
+          </a:p>
+          <a:p>
+            <a:r>
+              <a:rPr lang="en-US" dirty="0">
+                <a:solidFill>
+                  <a:schemeClr val="tx1"/>
+                </a:solidFill>
+              </a:rPr>
+              <a:t>1. The </a:t>
+            </a:r>
+            <a:r>
+              <a:rPr lang="en-US" i="1" dirty="0">
+                <a:solidFill>
+                  <a:schemeClr val="tx1"/>
+                </a:solidFill>
+                <a:highlight>
+                  <a:srgbClr val="00FF00"/>
+                </a:highlight>
+              </a:rPr>
+              <a:t>same code </a:t>
+            </a:r>
+            <a:r>
+              <a:rPr lang="en-US" i="1" dirty="0">
+                <a:solidFill>
+                  <a:schemeClr val="tx1"/>
+                </a:solidFill>
+              </a:rPr>
+              <a:t> </a:t>
+            </a:r>
+            <a:r>
+              <a:rPr lang="en-US" dirty="0">
+                <a:solidFill>
+                  <a:schemeClr val="tx1"/>
+                </a:solidFill>
+              </a:rPr>
+              <a:t>runs on a single machine or a cluster of 100s of nodes.</a:t>
+            </a:r>
+          </a:p>
+          <a:p>
+            <a:r>
+              <a:rPr lang="en-US" dirty="0">
+                <a:solidFill>
+                  <a:schemeClr val="tx1"/>
+                </a:solidFill>
+              </a:rPr>
+              <a:t>2. Develop locally: Build and test on one machine.</a:t>
+            </a:r>
+          </a:p>
+          <a:p>
+            <a:r>
+              <a:rPr lang="en-US" dirty="0">
+                <a:solidFill>
+                  <a:schemeClr val="tx1"/>
+                </a:solidFill>
+              </a:rPr>
+              <a:t>3. Scale through configuration: Choose the cluster and resources.</a:t>
+            </a:r>
+          </a:p>
+          <a:p>
+            <a:r>
+              <a:rPr lang="en-US" dirty="0">
+                <a:solidFill>
+                  <a:schemeClr val="tx1"/>
+                </a:solidFill>
+              </a:rPr>
+              <a:t>4. Let the engine distribute the work: It coordinates parallel execution across nodes.</a:t>
+            </a:r>
+          </a:p>
+          <a:p>
+            <a:r>
+              <a:rPr lang="en-US" dirty="0">
+                <a:solidFill>
+                  <a:schemeClr val="tx1"/>
+                </a:solidFill>
+              </a:rPr>
+              <a:t>5. With a distributed processing engine, the execution environment changes—the application code can stay the same.</a:t>
+            </a:r>
+          </a:p>
+          <a:p>
+            <a:endParaRPr lang="en-US" sz="2800" dirty="0">
+              <a:solidFill>
+                <a:schemeClr val="tx1"/>
+              </a:solidFill>
+              <a:highlight>
+                <a:srgbClr val="FFFF00"/>
+              </a:highlight>
+              <a:latin typeface="Courier" pitchFamily="2" charset="0"/>
+            </a:endParaRPr>
+          </a:p>
+        </p:txBody>
+      </p:sp>
+      <p:sp>
+        <p:nvSpPr>
+          <p:cNvPr id="4" name="Slide Number">
+            <a:extLst>
+              <a:ext uri="{FF2B5EF4-FFF2-40B4-BE49-F238E27FC236}">
+                <a16:creationId xmlns:a16="http://schemas.microsoft.com/office/drawing/2014/main" id="{80DF8B32-8D33-2D5E-5794-EBB2ED62AD62}"/>
+              </a:ext>
+            </a:extLst>
+          </p:cNvPr>
+          <p:cNvSpPr>
+            <a:spLocks noGrp="1"/>
+          </p:cNvSpPr>
+          <p:nvPr/>
+        </p:nvSpPr>
+        <p:spPr>
+          <a:xfrm>
+            <a:off x="11334750" y="6457950"/>
+            <a:ext cx="571500" cy="266700"/>
+          </a:xfrm>
+          <a:prstGeom prst="rect">
+            <a:avLst/>
+          </a:prstGeom>
+          <a:noFill/>
+          <a:ln w="0">
+            <a:noFill/>
+          </a:ln>
+        </p:spPr>
+        <p:txBody>
+          <a:bodyPr/>
+          <a:lstStyle/>
+          <a:p>
+            <a:pPr algn="r">
+              <a:defRPr sz="1350">
+                <a:solidFill>
+                  <a:srgbClr val="555555"/>
+                </a:solidFill>
+              </a:defRPr>
+            </a:pPr>
+            <a:fld id="{0467E1A8-AC54-431C-BF00-83F62F9662C0}" type="slidenum">
+              <a:rPr sz="1350">
+                <a:solidFill>
+                  <a:srgbClr val="555555"/>
+                </a:solidFill>
+              </a:rPr>
+              <a:t>27</a:t>
+            </a:fld>
+            <a:endParaRPr sz="1350">
+              <a:solidFill>
+                <a:srgbClr val="555555"/>
+              </a:solidFill>
+            </a:endParaRPr>
+          </a:p>
+        </p:txBody>
+      </p:sp>
+    </p:spTree>
+    <p:extLst>
+      <p:ext uri="{BB962C8B-B14F-4D97-AF65-F5344CB8AC3E}">
+        <p14:creationId xmlns:p14="http://schemas.microsoft.com/office/powerpoint/2010/main" val="1438871042"/>
+      </p:ext>
+    </p:extLst>
+  </p:cSld>
+  <p:clrMapOvr>
+    <a:masterClrMapping/>
+  </p:clrMapOvr>
+  <p:timing>
+    <p:tnLst>
+      <p:par>
+        <p:cTn id="1" dur="indefinite" restart="never" nodeType="tmRoot">
+          <p:childTnLst>
+            <p:seq concurrent="1" nextAc="seek">
+              <p:cTn id="2" dur="indefinite" nodeType="mainSeq">
+                <p:childTnLst>
+                  <p:par>
+                    <p:cTn id="3" fill="hold">
+                      <p:stCondLst>
+                        <p:cond delay="indefinite"/>
+                      </p:stCondLst>
+                      <p:childTnLst>
+                        <p:par>
+                          <p:cTn id="4" fill="hold">
+                            <p:stCondLst>
+                              <p:cond delay="0"/>
+                            </p:stCondLst>
+                            <p:childTnLst>
+                              <p:par>
+                                <p:cTn id="5" presetID="1" presetClass="entr" presetSubtype="0" fill="hold" nodeType="clickEffect">
+                                  <p:stCondLst>
+                                    <p:cond delay="0"/>
+                                  </p:stCondLst>
+                                  <p:childTnLst>
+                                    <p:set>
+                                      <p:cBhvr>
+                                        <p:cTn id="6" dur="1" fill="hold">
+                                          <p:stCondLst>
+                                            <p:cond delay="0"/>
+                                          </p:stCondLst>
+                                        </p:cTn>
+                                        <p:tgtEl>
+                                          <p:spTgt spid="3">
+                                            <p:txEl>
+                                              <p:pRg st="0" end="0"/>
+                                            </p:txEl>
+                                          </p:spTgt>
+                                        </p:tgtEl>
+                                        <p:attrNameLst>
+                                          <p:attrName>style.visibility</p:attrName>
+                                        </p:attrNameLst>
+                                      </p:cBhvr>
+                                      <p:to>
+                                        <p:strVal val="visible"/>
+                                      </p:to>
+                                    </p:set>
+                                  </p:childTnLst>
+                                </p:cTn>
+                              </p:par>
+                            </p:childTnLst>
+                          </p:cTn>
+                        </p:par>
+                      </p:childTnLst>
+                    </p:cTn>
+                  </p:par>
+                  <p:par>
+                    <p:cTn id="7" fill="hold">
+                      <p:stCondLst>
+                        <p:cond delay="indefinite"/>
+                      </p:stCondLst>
+                      <p:childTnLst>
+                        <p:par>
+                          <p:cTn id="8" fill="hold">
+                            <p:stCondLst>
+                              <p:cond delay="0"/>
+                            </p:stCondLst>
+                            <p:childTnLst>
+                              <p:par>
+                                <p:cTn id="9" presetID="1" presetClass="entr" presetSubtype="0" fill="hold" nodeType="clickEffect">
+                                  <p:stCondLst>
+                                    <p:cond delay="0"/>
+                                  </p:stCondLst>
+                                  <p:childTnLst>
+                                    <p:set>
+                                      <p:cBhvr>
+                                        <p:cTn id="10" dur="1" fill="hold">
+                                          <p:stCondLst>
+                                            <p:cond delay="0"/>
+                                          </p:stCondLst>
+                                        </p:cTn>
+                                        <p:tgtEl>
+                                          <p:spTgt spid="3">
+                                            <p:txEl>
+                                              <p:pRg st="1" end="1"/>
+                                            </p:txEl>
+                                          </p:spTgt>
+                                        </p:tgtEl>
+                                        <p:attrNameLst>
+                                          <p:attrName>style.visibility</p:attrName>
+                                        </p:attrNameLst>
+                                      </p:cBhvr>
+                                      <p:to>
+                                        <p:strVal val="visible"/>
+                                      </p:to>
+                                    </p:set>
+                                  </p:childTnLst>
+                                </p:cTn>
+                              </p:par>
+                            </p:childTnLst>
+                          </p:cTn>
+                        </p:par>
+                      </p:childTnLst>
+                    </p:cTn>
+                  </p:par>
+                </p:childTnLst>
+              </p:cTn>
+              <p:prevCondLst>
+                <p:cond evt="onPrev" delay="0">
+                  <p:tgtEl>
+                    <p:sldTgt/>
+                  </p:tgtEl>
+                </p:cond>
+              </p:prevCondLst>
+              <p:nextCondLst>
+                <p:cond evt="onNext" delay="0">
+                  <p:tgtEl>
+                    <p:sldTgt/>
+                  </p:tgtEl>
+                </p:cond>
+              </p:nextCondLst>
+            </p:seq>
+          </p:childTnLst>
+        </p:cTn>
+      </p:par>
+    </p:tnLst>
+  </p:timing>
+</p:sld>
+</file>
+
+<file path=ppt/slides/slide28.xml><?xml version="1.0" encoding="utf-8"?>
+<p:sld xmlns:a="http://schemas.openxmlformats.org/drawingml/2006/main" xmlns:r="http://schemas.openxmlformats.org/officeDocument/2006/relationships" xmlns:p="http://schemas.openxmlformats.org/presentationml/2006/main">
+  <p:cSld>
+    <p:spTree>
+      <p:nvGrpSpPr>
+        <p:cNvPr id="1" name="">
+          <a:extLst>
+            <a:ext uri="{FF2B5EF4-FFF2-40B4-BE49-F238E27FC236}">
               <a16:creationId xmlns:a16="http://schemas.microsoft.com/office/drawing/2014/main" id="{4064C889-35E5-DA56-6C16-9F4FC74D86B0}"/>
             </a:ext>
           </a:extLst>
@@ -17095,7 +17537,7 @@
                   <a:srgbClr val="555555"/>
                 </a:solidFill>
               </a:rPr>
-              <a:t>27</a:t>
+              <a:t>28</a:t>
             </a:fld>
             <a:endParaRPr sz="1350">
               <a:solidFill>
@@ -17118,7 +17560,7 @@
 </p:sld>
 </file>
 
-<file path=ppt/slides/slide28.xml><?xml version="1.0" encoding="utf-8"?>
+<file path=ppt/slides/slide29.xml><?xml version="1.0" encoding="utf-8"?>
 <p:sld xmlns:a="http://schemas.openxmlformats.org/drawingml/2006/main" xmlns:r="http://schemas.openxmlformats.org/officeDocument/2006/relationships" xmlns:p="http://schemas.openxmlformats.org/presentationml/2006/main">
   <p:cSld>
     <p:spTree>
@@ -17244,7 +17686,7 @@
                   <a:srgbClr val="555555"/>
                 </a:solidFill>
               </a:rPr>
-              <a:t>28</a:t>
+              <a:t>29</a:t>
             </a:fld>
             <a:endParaRPr sz="1350">
               <a:solidFill>
@@ -17267,7 +17709,433 @@
 </p:sld>
 </file>
 
-<file path=ppt/slides/slide29.xml><?xml version="1.0" encoding="utf-8"?>
+<file path=ppt/slides/slide3.xml><?xml version="1.0" encoding="utf-8"?>
+<p:sld xmlns:a="http://schemas.openxmlformats.org/drawingml/2006/main" xmlns:r="http://schemas.openxmlformats.org/officeDocument/2006/relationships" xmlns:p="http://schemas.openxmlformats.org/presentationml/2006/main">
+  <p:cSld>
+    <p:spTree>
+      <p:nvGrpSpPr>
+        <p:cNvPr id="1" name="">
+          <a:extLst>
+            <a:ext uri="{FF2B5EF4-FFF2-40B4-BE49-F238E27FC236}">
+              <a16:creationId xmlns:a16="http://schemas.microsoft.com/office/drawing/2014/main" id="{F27D7243-15AD-425E-DFCF-2A2EE95FA6F7}"/>
+            </a:ext>
+          </a:extLst>
+        </p:cNvPr>
+        <p:cNvGrpSpPr/>
+        <p:nvPr/>
+      </p:nvGrpSpPr>
+      <p:grpSpPr>
+        <a:xfrm>
+          <a:off x="0" y="0"/>
+          <a:ext cx="0" cy="0"/>
+          <a:chOff x="0" y="0"/>
+          <a:chExt cx="0" cy="0"/>
+        </a:xfrm>
+      </p:grpSpPr>
+      <p:sp>
+        <p:nvSpPr>
+          <p:cNvPr id="2" name="Title 1">
+            <a:extLst>
+              <a:ext uri="{FF2B5EF4-FFF2-40B4-BE49-F238E27FC236}">
+                <a16:creationId xmlns:a16="http://schemas.microsoft.com/office/drawing/2014/main" id="{5CB8F834-4DE8-3048-DAA2-4FBC5C624122}"/>
+              </a:ext>
+            </a:extLst>
+          </p:cNvPr>
+          <p:cNvSpPr>
+            <a:spLocks noGrp="1"/>
+          </p:cNvSpPr>
+          <p:nvPr>
+            <p:ph type="ctrTitle"/>
+          </p:nvPr>
+        </p:nvSpPr>
+        <p:spPr>
+          <a:xfrm>
+            <a:off x="1413468" y="290725"/>
+            <a:ext cx="9144000" cy="764352"/>
+          </a:xfrm>
+        </p:spPr>
+        <p:txBody>
+          <a:bodyPr>
+            <a:normAutofit/>
+          </a:bodyPr>
+          <a:lstStyle/>
+          <a:p>
+            <a:r>
+              <a:rPr lang="en-US" sz="3600" dirty="0">
+                <a:solidFill>
+                  <a:srgbClr val="0070C0"/>
+                </a:solidFill>
+              </a:rPr>
+              <a:t>1. What is Big Data?</a:t>
+            </a:r>
+          </a:p>
+        </p:txBody>
+      </p:sp>
+      <p:sp>
+        <p:nvSpPr>
+          <p:cNvPr id="3" name="Subtitle 2">
+            <a:extLst>
+              <a:ext uri="{FF2B5EF4-FFF2-40B4-BE49-F238E27FC236}">
+                <a16:creationId xmlns:a16="http://schemas.microsoft.com/office/drawing/2014/main" id="{D619F36D-D67A-B1D0-6CD3-5B3D4D9B070A}"/>
+              </a:ext>
+            </a:extLst>
+          </p:cNvPr>
+          <p:cNvSpPr>
+            <a:spLocks noGrp="1"/>
+          </p:cNvSpPr>
+          <p:nvPr>
+            <p:ph type="subTitle" idx="1"/>
+          </p:nvPr>
+        </p:nvSpPr>
+        <p:spPr>
+          <a:xfrm>
+            <a:off x="1307184" y="1225899"/>
+            <a:ext cx="9144000" cy="5114611"/>
+          </a:xfrm>
+        </p:spPr>
+        <p:txBody>
+          <a:bodyPr>
+            <a:normAutofit fontScale="92500" lnSpcReduction="20000"/>
+          </a:bodyPr>
+          <a:lstStyle/>
+          <a:p>
+            <a:r>
+              <a:rPr lang="en-US" sz="3200" dirty="0">
+                <a:solidFill>
+                  <a:schemeClr val="tx1"/>
+                </a:solidFill>
+                <a:highlight>
+                  <a:srgbClr val="FFFF00"/>
+                </a:highlight>
+              </a:rPr>
+              <a:t>Big Data</a:t>
+            </a:r>
+            <a:r>
+              <a:rPr lang="en-US" sz="3200" dirty="0">
+                <a:solidFill>
+                  <a:schemeClr val="tx1"/>
+                </a:solidFill>
+              </a:rPr>
+              <a:t> refers to datasets that are </a:t>
+            </a:r>
+            <a:r>
+              <a:rPr lang="en-US" sz="3200" u="sng" dirty="0">
+                <a:solidFill>
+                  <a:schemeClr val="tx1"/>
+                </a:solidFill>
+                <a:highlight>
+                  <a:srgbClr val="00FF00"/>
+                </a:highlight>
+              </a:rPr>
+              <a:t>so massive</a:t>
+            </a:r>
+            <a:r>
+              <a:rPr lang="en-US" sz="3200" dirty="0">
+                <a:solidFill>
+                  <a:schemeClr val="tx1"/>
+                </a:solidFill>
+              </a:rPr>
+              <a:t>, </a:t>
+            </a:r>
+          </a:p>
+          <a:p>
+            <a:r>
+              <a:rPr lang="en-US" sz="3200" u="sng" dirty="0">
+                <a:solidFill>
+                  <a:srgbClr val="0070C0"/>
+                </a:solidFill>
+                <a:highlight>
+                  <a:srgbClr val="00FF00"/>
+                </a:highlight>
+              </a:rPr>
+              <a:t>fast-moving</a:t>
+            </a:r>
+            <a:r>
+              <a:rPr lang="en-US" sz="3200" dirty="0">
+                <a:solidFill>
+                  <a:schemeClr val="tx1"/>
+                </a:solidFill>
+              </a:rPr>
+              <a:t>,  and </a:t>
+            </a:r>
+            <a:r>
+              <a:rPr lang="en-US" sz="3200" u="sng" dirty="0">
+                <a:solidFill>
+                  <a:srgbClr val="7030A0"/>
+                </a:solidFill>
+                <a:highlight>
+                  <a:srgbClr val="00FF00"/>
+                </a:highlight>
+              </a:rPr>
+              <a:t>complex</a:t>
+            </a:r>
+            <a:r>
+              <a:rPr lang="en-US" sz="3200" dirty="0">
+                <a:solidFill>
+                  <a:schemeClr val="tx1"/>
+                </a:solidFill>
+              </a:rPr>
+              <a:t> that traditional data-processing </a:t>
+            </a:r>
+          </a:p>
+          <a:p>
+            <a:r>
+              <a:rPr lang="en-US" sz="3200" dirty="0">
+                <a:solidFill>
+                  <a:schemeClr val="tx1"/>
+                </a:solidFill>
+              </a:rPr>
+              <a:t>software cannot capture, store, or analyze them effectively</a:t>
+            </a:r>
+            <a:r>
+              <a:rPr lang="en-US" sz="3200" b="1" dirty="0">
+                <a:solidFill>
+                  <a:schemeClr val="tx1"/>
+                </a:solidFill>
+              </a:rPr>
+              <a:t>.</a:t>
+            </a:r>
+            <a:r>
+              <a:rPr lang="en-US" sz="3200" dirty="0">
+                <a:solidFill>
+                  <a:schemeClr val="tx1"/>
+                </a:solidFill>
+              </a:rPr>
+              <a:t> </a:t>
+            </a:r>
+          </a:p>
+          <a:p>
+            <a:endParaRPr lang="en-US" sz="3200" dirty="0">
+              <a:solidFill>
+                <a:schemeClr val="tx1"/>
+              </a:solidFill>
+            </a:endParaRPr>
+          </a:p>
+          <a:p>
+            <a:r>
+              <a:rPr lang="en-US" sz="3200" dirty="0">
+                <a:solidFill>
+                  <a:schemeClr val="tx1"/>
+                </a:solidFill>
+              </a:rPr>
+              <a:t>Instead of relying on a  </a:t>
+            </a:r>
+            <a:r>
+              <a:rPr lang="en-US" sz="3200" dirty="0">
+                <a:solidFill>
+                  <a:schemeClr val="accent1"/>
+                </a:solidFill>
+                <a:highlight>
+                  <a:srgbClr val="0000FF"/>
+                </a:highlight>
+              </a:rPr>
+              <a:t>single computer </a:t>
+            </a:r>
+            <a:r>
+              <a:rPr lang="en-US" sz="3200" dirty="0">
+                <a:solidFill>
+                  <a:schemeClr val="tx1"/>
+                </a:solidFill>
+              </a:rPr>
+              <a:t>, </a:t>
+            </a:r>
+          </a:p>
+          <a:p>
+            <a:r>
+              <a:rPr lang="en-US" sz="3200" dirty="0">
+                <a:solidFill>
+                  <a:schemeClr val="tx1"/>
+                </a:solidFill>
+              </a:rPr>
+              <a:t>big data requires </a:t>
+            </a:r>
+            <a:r>
+              <a:rPr lang="en-US" sz="3200" u="sng" dirty="0">
+                <a:solidFill>
+                  <a:schemeClr val="tx1"/>
+                </a:solidFill>
+              </a:rPr>
+              <a:t>cluster computing frameworks </a:t>
+            </a:r>
+            <a:r>
+              <a:rPr lang="en-US" sz="3200" dirty="0">
+                <a:solidFill>
+                  <a:schemeClr val="tx1"/>
+                </a:solidFill>
+              </a:rPr>
+              <a:t>like </a:t>
+            </a:r>
+          </a:p>
+          <a:p>
+            <a:pPr marL="457200" indent="-457200">
+              <a:buFont typeface="Arial" panose="020B0604020202020204" pitchFamily="34" charset="0"/>
+              <a:buChar char="•"/>
+            </a:pPr>
+            <a:r>
+              <a:rPr lang="en-US" sz="3200" dirty="0">
+                <a:solidFill>
+                  <a:schemeClr val="tx1"/>
+                </a:solidFill>
+                <a:highlight>
+                  <a:srgbClr val="00FFFF"/>
+                </a:highlight>
+                <a:hlinkClick r:id="rId2">
+                  <a:extLst>
+                    <a:ext uri="{A12FA001-AC4F-418D-AE19-62706E023703}">
+                      <ahyp:hlinkClr xmlns:ahyp="http://schemas.microsoft.com/office/drawing/2018/hyperlinkcolor" val="tx"/>
+                    </a:ext>
+                  </a:extLst>
+                </a:hlinkClick>
+              </a:rPr>
+              <a:t>Apache Spark</a:t>
+            </a:r>
+            <a:endParaRPr lang="en-US" sz="3200" dirty="0">
+              <a:solidFill>
+                <a:schemeClr val="tx1"/>
+              </a:solidFill>
+              <a:highlight>
+                <a:srgbClr val="00FFFF"/>
+              </a:highlight>
+            </a:endParaRPr>
+          </a:p>
+          <a:p>
+            <a:pPr marL="457200" indent="-457200">
+              <a:buFont typeface="Arial" panose="020B0604020202020204" pitchFamily="34" charset="0"/>
+              <a:buChar char="•"/>
+            </a:pPr>
+            <a:r>
+              <a:rPr lang="en-US" sz="3200" dirty="0">
+                <a:solidFill>
+                  <a:schemeClr val="tx1"/>
+                </a:solidFill>
+                <a:highlight>
+                  <a:srgbClr val="00FFFF"/>
+                </a:highlight>
+              </a:rPr>
+              <a:t>Snowflake</a:t>
+            </a:r>
+          </a:p>
+          <a:p>
+            <a:pPr marL="457200" indent="-457200">
+              <a:buFont typeface="Arial" panose="020B0604020202020204" pitchFamily="34" charset="0"/>
+              <a:buChar char="•"/>
+            </a:pPr>
+            <a:r>
+              <a:rPr lang="en-US" sz="3200" dirty="0">
+                <a:solidFill>
+                  <a:schemeClr val="tx1"/>
+                </a:solidFill>
+                <a:highlight>
+                  <a:srgbClr val="00FFFF"/>
+                </a:highlight>
+              </a:rPr>
+              <a:t>Amazon Athena</a:t>
+            </a:r>
+          </a:p>
+          <a:p>
+            <a:pPr marL="457200" indent="-457200">
+              <a:buFont typeface="Arial" panose="020B0604020202020204" pitchFamily="34" charset="0"/>
+              <a:buChar char="•"/>
+            </a:pPr>
+            <a:r>
+              <a:rPr lang="en-US" sz="3200" dirty="0">
+                <a:solidFill>
+                  <a:schemeClr val="tx1"/>
+                </a:solidFill>
+                <a:highlight>
+                  <a:srgbClr val="00FFFF"/>
+                </a:highlight>
+              </a:rPr>
+              <a:t>Google’s BigQuery</a:t>
+            </a:r>
+          </a:p>
+          <a:p>
+            <a:endParaRPr lang="en-US" sz="3200" dirty="0">
+              <a:solidFill>
+                <a:schemeClr val="tx1"/>
+              </a:solidFill>
+            </a:endParaRPr>
+          </a:p>
+          <a:p>
+            <a:endParaRPr lang="en-US" sz="3200" dirty="0"/>
+          </a:p>
+          <a:p>
+            <a:pPr marL="800100" lvl="1" indent="-342900" algn="l">
+              <a:buFont typeface="+mj-lt"/>
+              <a:buAutoNum type="arabicPeriod"/>
+            </a:pPr>
+            <a:endParaRPr lang="en-US" sz="1200" dirty="0"/>
+          </a:p>
+        </p:txBody>
+      </p:sp>
+      <p:sp>
+        <p:nvSpPr>
+          <p:cNvPr id="4" name="Slide Number">
+            <a:extLst>
+              <a:ext uri="{FF2B5EF4-FFF2-40B4-BE49-F238E27FC236}">
+                <a16:creationId xmlns:a16="http://schemas.microsoft.com/office/drawing/2014/main" id="{90295111-642A-45CA-B8EA-9089545A24F5}"/>
+              </a:ext>
+            </a:extLst>
+          </p:cNvPr>
+          <p:cNvSpPr>
+            <a:spLocks noGrp="1"/>
+          </p:cNvSpPr>
+          <p:nvPr/>
+        </p:nvSpPr>
+        <p:spPr>
+          <a:xfrm>
+            <a:off x="11334750" y="6457950"/>
+            <a:ext cx="571500" cy="266700"/>
+          </a:xfrm>
+          <a:prstGeom prst="rect">
+            <a:avLst/>
+          </a:prstGeom>
+          <a:noFill/>
+          <a:ln w="0">
+            <a:noFill/>
+          </a:ln>
+        </p:spPr>
+        <p:txBody>
+          <a:bodyPr/>
+          <a:lstStyle/>
+          <a:p>
+            <a:pPr algn="r">
+              <a:defRPr sz="1350">
+                <a:solidFill>
+                  <a:srgbClr val="555555"/>
+                </a:solidFill>
+              </a:defRPr>
+            </a:pPr>
+            <a:fld id="{55B68B6A-B980-46CC-A2AF-BBC70662A6DE}" type="slidenum">
+              <a:rPr sz="1350">
+                <a:solidFill>
+                  <a:srgbClr val="555555"/>
+                </a:solidFill>
+              </a:rPr>
+              <a:t>3</a:t>
+            </a:fld>
+            <a:endParaRPr sz="1350">
+              <a:solidFill>
+                <a:srgbClr val="555555"/>
+              </a:solidFill>
+            </a:endParaRPr>
+          </a:p>
+        </p:txBody>
+      </p:sp>
+    </p:spTree>
+    <p:extLst>
+      <p:ext uri="{BB962C8B-B14F-4D97-AF65-F5344CB8AC3E}">
+        <p14:creationId xmlns:p14="http://schemas.microsoft.com/office/powerpoint/2010/main" val="2377715886"/>
+      </p:ext>
+    </p:extLst>
+  </p:cSld>
+  <p:clrMapOvr>
+    <a:masterClrMapping/>
+  </p:clrMapOvr>
+</p:sld>
+</file>
+
+<file path=ppt/slides/slide30.xml><?xml version="1.0" encoding="utf-8"?>
 <p:sld xmlns:a="http://schemas.openxmlformats.org/drawingml/2006/main" xmlns:r="http://schemas.openxmlformats.org/officeDocument/2006/relationships" xmlns:p="http://schemas.openxmlformats.org/presentationml/2006/main">
   <p:cSld>
     <p:spTree>
@@ -17408,7 +18276,7 @@
                   <a:srgbClr val="555555"/>
                 </a:solidFill>
               </a:rPr>
-              <a:t>29</a:t>
+              <a:t>30</a:t>
             </a:fld>
             <a:endParaRPr sz="1350">
               <a:solidFill>
@@ -17431,433 +18299,7 @@
 </p:sld>
 </file>
 
-<file path=ppt/slides/slide3.xml><?xml version="1.0" encoding="utf-8"?>
-<p:sld xmlns:a="http://schemas.openxmlformats.org/drawingml/2006/main" xmlns:r="http://schemas.openxmlformats.org/officeDocument/2006/relationships" xmlns:p="http://schemas.openxmlformats.org/presentationml/2006/main">
-  <p:cSld>
-    <p:spTree>
-      <p:nvGrpSpPr>
-        <p:cNvPr id="1" name="">
-          <a:extLst>
-            <a:ext uri="{FF2B5EF4-FFF2-40B4-BE49-F238E27FC236}">
-              <a16:creationId xmlns:a16="http://schemas.microsoft.com/office/drawing/2014/main" id="{F27D7243-15AD-425E-DFCF-2A2EE95FA6F7}"/>
-            </a:ext>
-          </a:extLst>
-        </p:cNvPr>
-        <p:cNvGrpSpPr/>
-        <p:nvPr/>
-      </p:nvGrpSpPr>
-      <p:grpSpPr>
-        <a:xfrm>
-          <a:off x="0" y="0"/>
-          <a:ext cx="0" cy="0"/>
-          <a:chOff x="0" y="0"/>
-          <a:chExt cx="0" cy="0"/>
-        </a:xfrm>
-      </p:grpSpPr>
-      <p:sp>
-        <p:nvSpPr>
-          <p:cNvPr id="2" name="Title 1">
-            <a:extLst>
-              <a:ext uri="{FF2B5EF4-FFF2-40B4-BE49-F238E27FC236}">
-                <a16:creationId xmlns:a16="http://schemas.microsoft.com/office/drawing/2014/main" id="{5CB8F834-4DE8-3048-DAA2-4FBC5C624122}"/>
-              </a:ext>
-            </a:extLst>
-          </p:cNvPr>
-          <p:cNvSpPr>
-            <a:spLocks noGrp="1"/>
-          </p:cNvSpPr>
-          <p:nvPr>
-            <p:ph type="ctrTitle"/>
-          </p:nvPr>
-        </p:nvSpPr>
-        <p:spPr>
-          <a:xfrm>
-            <a:off x="1413468" y="290725"/>
-            <a:ext cx="9144000" cy="764352"/>
-          </a:xfrm>
-        </p:spPr>
-        <p:txBody>
-          <a:bodyPr>
-            <a:normAutofit/>
-          </a:bodyPr>
-          <a:lstStyle/>
-          <a:p>
-            <a:r>
-              <a:rPr lang="en-US" sz="3600" dirty="0">
-                <a:solidFill>
-                  <a:srgbClr val="0070C0"/>
-                </a:solidFill>
-              </a:rPr>
-              <a:t>1. What is Big Data?</a:t>
-            </a:r>
-          </a:p>
-        </p:txBody>
-      </p:sp>
-      <p:sp>
-        <p:nvSpPr>
-          <p:cNvPr id="3" name="Subtitle 2">
-            <a:extLst>
-              <a:ext uri="{FF2B5EF4-FFF2-40B4-BE49-F238E27FC236}">
-                <a16:creationId xmlns:a16="http://schemas.microsoft.com/office/drawing/2014/main" id="{D619F36D-D67A-B1D0-6CD3-5B3D4D9B070A}"/>
-              </a:ext>
-            </a:extLst>
-          </p:cNvPr>
-          <p:cNvSpPr>
-            <a:spLocks noGrp="1"/>
-          </p:cNvSpPr>
-          <p:nvPr>
-            <p:ph type="subTitle" idx="1"/>
-          </p:nvPr>
-        </p:nvSpPr>
-        <p:spPr>
-          <a:xfrm>
-            <a:off x="1307184" y="1225899"/>
-            <a:ext cx="9144000" cy="5114611"/>
-          </a:xfrm>
-        </p:spPr>
-        <p:txBody>
-          <a:bodyPr>
-            <a:normAutofit fontScale="92500" lnSpcReduction="20000"/>
-          </a:bodyPr>
-          <a:lstStyle/>
-          <a:p>
-            <a:r>
-              <a:rPr lang="en-US" sz="3200" dirty="0">
-                <a:solidFill>
-                  <a:schemeClr val="tx1"/>
-                </a:solidFill>
-                <a:highlight>
-                  <a:srgbClr val="FFFF00"/>
-                </a:highlight>
-              </a:rPr>
-              <a:t>Big Data</a:t>
-            </a:r>
-            <a:r>
-              <a:rPr lang="en-US" sz="3200" dirty="0">
-                <a:solidFill>
-                  <a:schemeClr val="tx1"/>
-                </a:solidFill>
-              </a:rPr>
-              <a:t> refers to datasets that are </a:t>
-            </a:r>
-            <a:r>
-              <a:rPr lang="en-US" sz="3200" u="sng" dirty="0">
-                <a:solidFill>
-                  <a:schemeClr val="tx1"/>
-                </a:solidFill>
-                <a:highlight>
-                  <a:srgbClr val="00FF00"/>
-                </a:highlight>
-              </a:rPr>
-              <a:t>so massive</a:t>
-            </a:r>
-            <a:r>
-              <a:rPr lang="en-US" sz="3200" dirty="0">
-                <a:solidFill>
-                  <a:schemeClr val="tx1"/>
-                </a:solidFill>
-              </a:rPr>
-              <a:t>, </a:t>
-            </a:r>
-          </a:p>
-          <a:p>
-            <a:r>
-              <a:rPr lang="en-US" sz="3200" u="sng" dirty="0">
-                <a:solidFill>
-                  <a:srgbClr val="0070C0"/>
-                </a:solidFill>
-                <a:highlight>
-                  <a:srgbClr val="00FF00"/>
-                </a:highlight>
-              </a:rPr>
-              <a:t>fast-moving</a:t>
-            </a:r>
-            <a:r>
-              <a:rPr lang="en-US" sz="3200" dirty="0">
-                <a:solidFill>
-                  <a:schemeClr val="tx1"/>
-                </a:solidFill>
-              </a:rPr>
-              <a:t>,  and </a:t>
-            </a:r>
-            <a:r>
-              <a:rPr lang="en-US" sz="3200" u="sng" dirty="0">
-                <a:solidFill>
-                  <a:srgbClr val="7030A0"/>
-                </a:solidFill>
-                <a:highlight>
-                  <a:srgbClr val="00FF00"/>
-                </a:highlight>
-              </a:rPr>
-              <a:t>complex</a:t>
-            </a:r>
-            <a:r>
-              <a:rPr lang="en-US" sz="3200" dirty="0">
-                <a:solidFill>
-                  <a:schemeClr val="tx1"/>
-                </a:solidFill>
-              </a:rPr>
-              <a:t> that traditional data-processing </a:t>
-            </a:r>
-          </a:p>
-          <a:p>
-            <a:r>
-              <a:rPr lang="en-US" sz="3200" dirty="0">
-                <a:solidFill>
-                  <a:schemeClr val="tx1"/>
-                </a:solidFill>
-              </a:rPr>
-              <a:t>software cannot capture, store, or analyze them effectively</a:t>
-            </a:r>
-            <a:r>
-              <a:rPr lang="en-US" sz="3200" b="1" dirty="0">
-                <a:solidFill>
-                  <a:schemeClr val="tx1"/>
-                </a:solidFill>
-              </a:rPr>
-              <a:t>.</a:t>
-            </a:r>
-            <a:r>
-              <a:rPr lang="en-US" sz="3200" dirty="0">
-                <a:solidFill>
-                  <a:schemeClr val="tx1"/>
-                </a:solidFill>
-              </a:rPr>
-              <a:t> </a:t>
-            </a:r>
-          </a:p>
-          <a:p>
-            <a:endParaRPr lang="en-US" sz="3200" dirty="0">
-              <a:solidFill>
-                <a:schemeClr val="tx1"/>
-              </a:solidFill>
-            </a:endParaRPr>
-          </a:p>
-          <a:p>
-            <a:r>
-              <a:rPr lang="en-US" sz="3200" dirty="0">
-                <a:solidFill>
-                  <a:schemeClr val="tx1"/>
-                </a:solidFill>
-              </a:rPr>
-              <a:t>Instead of relying on a  </a:t>
-            </a:r>
-            <a:r>
-              <a:rPr lang="en-US" sz="3200" dirty="0">
-                <a:solidFill>
-                  <a:schemeClr val="accent1"/>
-                </a:solidFill>
-                <a:highlight>
-                  <a:srgbClr val="0000FF"/>
-                </a:highlight>
-              </a:rPr>
-              <a:t>single computer </a:t>
-            </a:r>
-            <a:r>
-              <a:rPr lang="en-US" sz="3200" dirty="0">
-                <a:solidFill>
-                  <a:schemeClr val="tx1"/>
-                </a:solidFill>
-              </a:rPr>
-              <a:t>, </a:t>
-            </a:r>
-          </a:p>
-          <a:p>
-            <a:r>
-              <a:rPr lang="en-US" sz="3200" dirty="0">
-                <a:solidFill>
-                  <a:schemeClr val="tx1"/>
-                </a:solidFill>
-              </a:rPr>
-              <a:t>big data requires </a:t>
-            </a:r>
-            <a:r>
-              <a:rPr lang="en-US" sz="3200" u="sng" dirty="0">
-                <a:solidFill>
-                  <a:schemeClr val="tx1"/>
-                </a:solidFill>
-              </a:rPr>
-              <a:t>cluster computing frameworks </a:t>
-            </a:r>
-            <a:r>
-              <a:rPr lang="en-US" sz="3200" dirty="0">
-                <a:solidFill>
-                  <a:schemeClr val="tx1"/>
-                </a:solidFill>
-              </a:rPr>
-              <a:t>like </a:t>
-            </a:r>
-          </a:p>
-          <a:p>
-            <a:pPr marL="457200" indent="-457200">
-              <a:buFont typeface="Arial" panose="020B0604020202020204" pitchFamily="34" charset="0"/>
-              <a:buChar char="•"/>
-            </a:pPr>
-            <a:r>
-              <a:rPr lang="en-US" sz="3200" dirty="0">
-                <a:solidFill>
-                  <a:schemeClr val="tx1"/>
-                </a:solidFill>
-                <a:highlight>
-                  <a:srgbClr val="00FFFF"/>
-                </a:highlight>
-                <a:hlinkClick r:id="rId2">
-                  <a:extLst>
-                    <a:ext uri="{A12FA001-AC4F-418D-AE19-62706E023703}">
-                      <ahyp:hlinkClr xmlns:ahyp="http://schemas.microsoft.com/office/drawing/2018/hyperlinkcolor" val="tx"/>
-                    </a:ext>
-                  </a:extLst>
-                </a:hlinkClick>
-              </a:rPr>
-              <a:t>Apache Spark</a:t>
-            </a:r>
-            <a:endParaRPr lang="en-US" sz="3200" dirty="0">
-              <a:solidFill>
-                <a:schemeClr val="tx1"/>
-              </a:solidFill>
-              <a:highlight>
-                <a:srgbClr val="00FFFF"/>
-              </a:highlight>
-            </a:endParaRPr>
-          </a:p>
-          <a:p>
-            <a:pPr marL="457200" indent="-457200">
-              <a:buFont typeface="Arial" panose="020B0604020202020204" pitchFamily="34" charset="0"/>
-              <a:buChar char="•"/>
-            </a:pPr>
-            <a:r>
-              <a:rPr lang="en-US" sz="3200" dirty="0">
-                <a:solidFill>
-                  <a:schemeClr val="tx1"/>
-                </a:solidFill>
-                <a:highlight>
-                  <a:srgbClr val="00FFFF"/>
-                </a:highlight>
-              </a:rPr>
-              <a:t>Snowflake</a:t>
-            </a:r>
-          </a:p>
-          <a:p>
-            <a:pPr marL="457200" indent="-457200">
-              <a:buFont typeface="Arial" panose="020B0604020202020204" pitchFamily="34" charset="0"/>
-              <a:buChar char="•"/>
-            </a:pPr>
-            <a:r>
-              <a:rPr lang="en-US" sz="3200" dirty="0">
-                <a:solidFill>
-                  <a:schemeClr val="tx1"/>
-                </a:solidFill>
-                <a:highlight>
-                  <a:srgbClr val="00FFFF"/>
-                </a:highlight>
-              </a:rPr>
-              <a:t>Amazon Athena</a:t>
-            </a:r>
-          </a:p>
-          <a:p>
-            <a:pPr marL="457200" indent="-457200">
-              <a:buFont typeface="Arial" panose="020B0604020202020204" pitchFamily="34" charset="0"/>
-              <a:buChar char="•"/>
-            </a:pPr>
-            <a:r>
-              <a:rPr lang="en-US" sz="3200" dirty="0">
-                <a:solidFill>
-                  <a:schemeClr val="tx1"/>
-                </a:solidFill>
-                <a:highlight>
-                  <a:srgbClr val="00FFFF"/>
-                </a:highlight>
-              </a:rPr>
-              <a:t>Google’s BigQuery</a:t>
-            </a:r>
-          </a:p>
-          <a:p>
-            <a:endParaRPr lang="en-US" sz="3200" dirty="0">
-              <a:solidFill>
-                <a:schemeClr val="tx1"/>
-              </a:solidFill>
-            </a:endParaRPr>
-          </a:p>
-          <a:p>
-            <a:endParaRPr lang="en-US" sz="3200" dirty="0"/>
-          </a:p>
-          <a:p>
-            <a:pPr marL="800100" lvl="1" indent="-342900" algn="l">
-              <a:buFont typeface="+mj-lt"/>
-              <a:buAutoNum type="arabicPeriod"/>
-            </a:pPr>
-            <a:endParaRPr lang="en-US" sz="1200" dirty="0"/>
-          </a:p>
-        </p:txBody>
-      </p:sp>
-      <p:sp>
-        <p:nvSpPr>
-          <p:cNvPr id="4" name="Slide Number">
-            <a:extLst>
-              <a:ext uri="{FF2B5EF4-FFF2-40B4-BE49-F238E27FC236}">
-                <a16:creationId xmlns:a16="http://schemas.microsoft.com/office/drawing/2014/main" id="{90295111-642A-45CA-B8EA-9089545A24F5}"/>
-              </a:ext>
-            </a:extLst>
-          </p:cNvPr>
-          <p:cNvSpPr>
-            <a:spLocks noGrp="1"/>
-          </p:cNvSpPr>
-          <p:nvPr/>
-        </p:nvSpPr>
-        <p:spPr>
-          <a:xfrm>
-            <a:off x="11334750" y="6457950"/>
-            <a:ext cx="571500" cy="266700"/>
-          </a:xfrm>
-          <a:prstGeom prst="rect">
-            <a:avLst/>
-          </a:prstGeom>
-          <a:noFill/>
-          <a:ln w="0">
-            <a:noFill/>
-          </a:ln>
-        </p:spPr>
-        <p:txBody>
-          <a:bodyPr/>
-          <a:lstStyle/>
-          <a:p>
-            <a:pPr algn="r">
-              <a:defRPr sz="1350">
-                <a:solidFill>
-                  <a:srgbClr val="555555"/>
-                </a:solidFill>
-              </a:defRPr>
-            </a:pPr>
-            <a:fld id="{55B68B6A-B980-46CC-A2AF-BBC70662A6DE}" type="slidenum">
-              <a:rPr sz="1350">
-                <a:solidFill>
-                  <a:srgbClr val="555555"/>
-                </a:solidFill>
-              </a:rPr>
-              <a:t>3</a:t>
-            </a:fld>
-            <a:endParaRPr sz="1350">
-              <a:solidFill>
-                <a:srgbClr val="555555"/>
-              </a:solidFill>
-            </a:endParaRPr>
-          </a:p>
-        </p:txBody>
-      </p:sp>
-    </p:spTree>
-    <p:extLst>
-      <p:ext uri="{BB962C8B-B14F-4D97-AF65-F5344CB8AC3E}">
-        <p14:creationId xmlns:p14="http://schemas.microsoft.com/office/powerpoint/2010/main" val="2377715886"/>
-      </p:ext>
-    </p:extLst>
-  </p:cSld>
-  <p:clrMapOvr>
-    <a:masterClrMapping/>
-  </p:clrMapOvr>
-</p:sld>
-</file>
-
-<file path=ppt/slides/slide30.xml><?xml version="1.0" encoding="utf-8"?>
+<file path=ppt/slides/slide31.xml><?xml version="1.0" encoding="utf-8"?>
 <p:sld xmlns:a="http://schemas.openxmlformats.org/drawingml/2006/main" xmlns:r="http://schemas.openxmlformats.org/officeDocument/2006/relationships" xmlns:p="http://schemas.openxmlformats.org/presentationml/2006/main">
   <p:cSld>
     <p:spTree>
@@ -17937,10 +18379,6 @@
           </a:bodyPr>
           <a:lstStyle/>
           <a:p>
-            <a:pPr marL="457200" indent="-457200">
-              <a:buFont typeface="Arial" panose="020B0604020202020204" pitchFamily="34" charset="0"/>
-              <a:buChar char="•"/>
-            </a:pPr>
             <a:r>
               <a:rPr lang="en-US" sz="3200" dirty="0">
                 <a:solidFill>
@@ -17969,7 +18407,7 @@
               <a:t> and </a:t>
             </a:r>
             <a:r>
-              <a:rPr lang="en-US" sz="3200" dirty="0" err="1">
+              <a:rPr lang="en-US" sz="3200" dirty="0">
                 <a:solidFill>
                   <a:schemeClr val="tx1"/>
                 </a:solidFill>
@@ -17979,20 +18417,9 @@
               </a:rPr>
               <a:t>DataFrame</a:t>
             </a:r>
-            <a:endParaRPr lang="en-US" sz="3200" dirty="0">
-              <a:solidFill>
-                <a:schemeClr val="tx1"/>
-              </a:solidFill>
-              <a:highlight>
-                <a:srgbClr val="00FF00"/>
-              </a:highlight>
-            </a:endParaRPr>
-          </a:p>
-          <a:p>
-            <a:pPr marL="457200" indent="-457200" algn="l">
-              <a:buFont typeface="Arial" panose="020B0604020202020204" pitchFamily="34" charset="0"/>
-              <a:buChar char="•"/>
-            </a:pPr>
+          </a:p>
+          <a:p>
+            <a:pPr algn="l"/>
             <a:r>
               <a:rPr lang="en-US" sz="3200" dirty="0">
                 <a:solidFill>
@@ -18014,6 +18441,23 @@
               <a:rPr lang="en-US" sz="2800" dirty="0"/>
               <a:t>Data is represented as a data type T </a:t>
             </a:r>
+            <a:r>
+              <a:rPr lang="en-US" sz="2400" dirty="0"/>
+              <a:t>(</a:t>
+            </a:r>
+            <a:r>
+              <a:rPr lang="en-US" sz="2400" b="1" dirty="0">
+                <a:solidFill>
+                  <a:srgbClr val="00B0F0"/>
+                </a:solidFill>
+              </a:rPr>
+              <a:t>semi-structured data</a:t>
+            </a:r>
+            <a:r>
+              <a:rPr lang="en-US" sz="2400" dirty="0"/>
+              <a:t>)</a:t>
+            </a:r>
+            <a:endParaRPr lang="en-US" sz="2800" dirty="0"/>
           </a:p>
           <a:p>
             <a:pPr lvl="1" algn="l"/>
@@ -18033,10 +18477,6 @@
             </a:r>
           </a:p>
           <a:p>
-            <a:pPr marL="457200" indent="-457200">
-              <a:buFont typeface="Arial" panose="020B0604020202020204" pitchFamily="34" charset="0"/>
-              <a:buChar char="•"/>
-            </a:pPr>
             <a:r>
               <a:rPr lang="en-US" sz="3200" dirty="0">
                 <a:solidFill>
@@ -18046,18 +18486,7 @@
                   <a:srgbClr val="00FF00"/>
                 </a:highlight>
               </a:rPr>
-              <a:t>2. </a:t>
-            </a:r>
-            <a:r>
-              <a:rPr lang="en-US" sz="3200" dirty="0" err="1">
-                <a:solidFill>
-                  <a:schemeClr val="tx1"/>
-                </a:solidFill>
-                <a:highlight>
-                  <a:srgbClr val="00FF00"/>
-                </a:highlight>
-              </a:rPr>
-              <a:t>DataFrame</a:t>
+              <a:t>2. DataFrame</a:t>
             </a:r>
             <a:endParaRPr lang="en-US" sz="3200" dirty="0"/>
           </a:p>
@@ -18076,7 +18505,27 @@
                   <a:srgbClr val="FFFF00"/>
                 </a:highlight>
               </a:rPr>
-              <a:t>table of rows and named columns</a:t>
+              <a:t>table of rows and named columns (</a:t>
+            </a:r>
+            <a:r>
+              <a:rPr lang="en-US" sz="2800" dirty="0"/>
+              <a:t> </a:t>
+            </a:r>
+            <a:r>
+              <a:rPr lang="en-US" sz="2800" b="1" dirty="0">
+                <a:solidFill>
+                  <a:srgbClr val="00B0F0"/>
+                </a:solidFill>
+              </a:rPr>
+              <a:t>structured data </a:t>
+            </a:r>
+            <a:r>
+              <a:rPr lang="en-US" sz="2800" dirty="0">
+                <a:highlight>
+                  <a:srgbClr val="FFFF00"/>
+                </a:highlight>
+              </a:rPr>
+              <a:t>)</a:t>
             </a:r>
           </a:p>
           <a:p>
@@ -18135,7 +18584,7 @@
                   <a:srgbClr val="555555"/>
                 </a:solidFill>
               </a:rPr>
-              <a:t>30</a:t>
+              <a:t>31</a:t>
             </a:fld>
             <a:endParaRPr sz="1350">
               <a:solidFill>
@@ -18526,7 +18975,7 @@
 </p:sld>
 </file>
 
-<file path=ppt/slides/slide31.xml><?xml version="1.0" encoding="utf-8"?>
+<file path=ppt/slides/slide32.xml><?xml version="1.0" encoding="utf-8"?>
 <p:sld xmlns:a="http://schemas.openxmlformats.org/drawingml/2006/main" xmlns:r="http://schemas.openxmlformats.org/officeDocument/2006/relationships" xmlns:p="http://schemas.openxmlformats.org/presentationml/2006/main">
   <p:cSld>
     <p:spTree>
@@ -19012,7 +19461,7 @@
                   <a:srgbClr val="555555"/>
                 </a:solidFill>
               </a:rPr>
-              <a:t>31</a:t>
+              <a:t>32</a:t>
             </a:fld>
             <a:endParaRPr sz="1350">
               <a:solidFill>
@@ -19035,7 +19484,7 @@
 </p:sld>
 </file>
 
-<file path=ppt/slides/slide32.xml><?xml version="1.0" encoding="utf-8"?>
+<file path=ppt/slides/slide33.xml><?xml version="1.0" encoding="utf-8"?>
 <p:sld xmlns:a="http://schemas.openxmlformats.org/drawingml/2006/main" xmlns:r="http://schemas.openxmlformats.org/officeDocument/2006/relationships" xmlns:p="http://schemas.openxmlformats.org/presentationml/2006/main">
   <p:cSld>
     <p:spTree>
@@ -19079,14 +19528,9 @@
           <a:lstStyle/>
           <a:p>
             <a:r>
-              <a:rPr lang="en-US"/>
-              <a:t>Spark Data Abstractions: </a:t>
-            </a:r>
-            <a:r>
-              <a:rPr lang="en-US" err="1"/>
-              <a:t>DataFrame</a:t>
-            </a:r>
-            <a:endParaRPr lang="en-US"/>
+              <a:rPr lang="en-US" dirty="0"/>
+              <a:t>Spark Data Abstractions: DataFrame</a:t>
+            </a:r>
           </a:p>
         </p:txBody>
       </p:sp>
@@ -19164,7 +19608,7 @@
                   <a:srgbClr val="555555"/>
                 </a:solidFill>
               </a:rPr>
-              <a:t>32</a:t>
+              <a:t>33</a:t>
             </a:fld>
             <a:endParaRPr sz="1350">
               <a:solidFill>
@@ -19187,7 +19631,7 @@
 </p:sld>
 </file>
 
-<file path=ppt/slides/slide33.xml><?xml version="1.0" encoding="utf-8"?>
+<file path=ppt/slides/slide34.xml><?xml version="1.0" encoding="utf-8"?>
 <p:sld xmlns:a="http://schemas.openxmlformats.org/drawingml/2006/main" xmlns:r="http://schemas.openxmlformats.org/officeDocument/2006/relationships" xmlns:p="http://schemas.openxmlformats.org/presentationml/2006/main">
   <p:cSld>
     <p:spTree>
@@ -19240,15 +19684,7 @@
           <a:p>
             <a:r>
               <a:rPr lang="en-US" sz="3200" dirty="0"/>
-              <a:t>PySpark </a:t>
-            </a:r>
-            <a:r>
-              <a:rPr lang="en-US" sz="3200" dirty="0" err="1"/>
-              <a:t>DataFrame</a:t>
-            </a:r>
-            <a:r>
-              <a:rPr lang="en-US" sz="3200" dirty="0"/>
-              <a:t> Example-1</a:t>
+              <a:t>PySpark DataFrame Example-1</a:t>
             </a:r>
           </a:p>
         </p:txBody>
@@ -19470,33 +19906,7 @@
                 <a:latin typeface="Consolas" panose="020B0609020204030204" pitchFamily="49" charset="0"/>
                 <a:cs typeface="Consolas" panose="020B0609020204030204" pitchFamily="49" charset="0"/>
               </a:rPr>
-              <a:t># 3. Create a sample </a:t>
-            </a:r>
-            <a:r>
-              <a:rPr lang="en-US" sz="1800" dirty="0" err="1">
-                <a:solidFill>
-                  <a:schemeClr val="tx1"/>
-                </a:solidFill>
-                <a:highlight>
-                  <a:srgbClr val="FFFF00"/>
-                </a:highlight>
-                <a:latin typeface="Consolas" panose="020B0609020204030204" pitchFamily="49" charset="0"/>
-                <a:cs typeface="Consolas" panose="020B0609020204030204" pitchFamily="49" charset="0"/>
-              </a:rPr>
-              <a:t>DataFrame</a:t>
-            </a:r>
-            <a:r>
-              <a:rPr lang="en-US" sz="1800" dirty="0">
-                <a:solidFill>
-                  <a:schemeClr val="tx1"/>
-                </a:solidFill>
-                <a:highlight>
-                  <a:srgbClr val="FFFF00"/>
-                </a:highlight>
-                <a:latin typeface="Consolas" panose="020B0609020204030204" pitchFamily="49" charset="0"/>
-                <a:cs typeface="Consolas" panose="020B0609020204030204" pitchFamily="49" charset="0"/>
-              </a:rPr>
-              <a:t> as </a:t>
+              <a:t># 3. Create a sample DataFrame as </a:t>
             </a:r>
             <a:r>
               <a:rPr lang="en-US" sz="1800" dirty="0" err="1">
@@ -19621,33 +20031,7 @@
                 <a:latin typeface="Consolas" panose="020B0609020204030204" pitchFamily="49" charset="0"/>
                 <a:cs typeface="Consolas" panose="020B0609020204030204" pitchFamily="49" charset="0"/>
               </a:rPr>
-              <a:t># 4. Register the </a:t>
-            </a:r>
-            <a:r>
-              <a:rPr lang="en-US" sz="1800" dirty="0" err="1">
-                <a:solidFill>
-                  <a:schemeClr val="tx1"/>
-                </a:solidFill>
-                <a:highlight>
-                  <a:srgbClr val="FFFF00"/>
-                </a:highlight>
-                <a:latin typeface="Consolas" panose="020B0609020204030204" pitchFamily="49" charset="0"/>
-                <a:cs typeface="Consolas" panose="020B0609020204030204" pitchFamily="49" charset="0"/>
-              </a:rPr>
-              <a:t>DataFrame</a:t>
-            </a:r>
-            <a:r>
-              <a:rPr lang="en-US" sz="1800" dirty="0">
-                <a:solidFill>
-                  <a:schemeClr val="tx1"/>
-                </a:solidFill>
-                <a:highlight>
-                  <a:srgbClr val="FFFF00"/>
-                </a:highlight>
-                <a:latin typeface="Consolas" panose="020B0609020204030204" pitchFamily="49" charset="0"/>
-                <a:cs typeface="Consolas" panose="020B0609020204030204" pitchFamily="49" charset="0"/>
-              </a:rPr>
-              <a:t> as a Temporary SQL View</a:t>
+              <a:t># 4. Register the DataFrame as a Temporary SQL View</a:t>
             </a:r>
           </a:p>
           <a:p>
@@ -19725,7 +20109,7 @@
                   <a:srgbClr val="555555"/>
                 </a:solidFill>
               </a:rPr>
-              <a:t>33</a:t>
+              <a:t>34</a:t>
             </a:fld>
             <a:endParaRPr sz="1350">
               <a:solidFill>
@@ -20317,7 +20701,7 @@
 </p:sld>
 </file>
 
-<file path=ppt/slides/slide34.xml><?xml version="1.0" encoding="utf-8"?>
+<file path=ppt/slides/slide35.xml><?xml version="1.0" encoding="utf-8"?>
 <p:sld xmlns:a="http://schemas.openxmlformats.org/drawingml/2006/main" xmlns:r="http://schemas.openxmlformats.org/officeDocument/2006/relationships" xmlns:p="http://schemas.openxmlformats.org/presentationml/2006/main">
   <p:cSld>
     <p:spTree>
@@ -20370,15 +20754,7 @@
           <a:p>
             <a:r>
               <a:rPr lang="en-US" sz="3200" dirty="0"/>
-              <a:t>PySpark </a:t>
-            </a:r>
-            <a:r>
-              <a:rPr lang="en-US" sz="3200" dirty="0" err="1"/>
-              <a:t>DataFrame</a:t>
-            </a:r>
-            <a:r>
-              <a:rPr lang="en-US" sz="3200" dirty="0"/>
-              <a:t> Example-1 </a:t>
+              <a:t>PySpark DataFrame Example-1 </a:t>
             </a:r>
             <a:r>
               <a:rPr lang="en-US" sz="1600" dirty="0"/>
@@ -20775,7 +21151,7 @@
                   <a:srgbClr val="555555"/>
                 </a:solidFill>
               </a:rPr>
-              <a:t>34</a:t>
+              <a:t>35</a:t>
             </a:fld>
             <a:endParaRPr sz="1350">
               <a:solidFill>
@@ -21465,7 +21841,7 @@
 </p:sld>
 </file>
 
-<file path=ppt/slides/slide35.xml><?xml version="1.0" encoding="utf-8"?>
+<file path=ppt/slides/slide36.xml><?xml version="1.0" encoding="utf-8"?>
 <p:sld xmlns:a="http://schemas.openxmlformats.org/drawingml/2006/main" xmlns:r="http://schemas.openxmlformats.org/officeDocument/2006/relationships" xmlns:p="http://schemas.openxmlformats.org/presentationml/2006/main">
   <p:cSld>
     <p:spTree>
@@ -21522,23 +21898,7 @@
                   <a:srgbClr val="00FFFF"/>
                 </a:highlight>
               </a:rPr>
-              <a:t>PySpark: create a </a:t>
-            </a:r>
-            <a:r>
-              <a:rPr lang="en-US" sz="3200" dirty="0" err="1">
-                <a:highlight>
-                  <a:srgbClr val="00FFFF"/>
-                </a:highlight>
-              </a:rPr>
-              <a:t>DataFrame</a:t>
-            </a:r>
-            <a:r>
-              <a:rPr lang="en-US" sz="3200" dirty="0">
-                <a:highlight>
-                  <a:srgbClr val="00FFFF"/>
-                </a:highlight>
-              </a:rPr>
-              <a:t> from a CSV File</a:t>
+              <a:t>PySpark: create a DataFrame from a CSV File</a:t>
             </a:r>
           </a:p>
         </p:txBody>
@@ -21639,33 +21999,7 @@
                 <a:latin typeface="Consolas" panose="020B0609020204030204" pitchFamily="49" charset="0"/>
                 <a:cs typeface="Consolas" panose="020B0609020204030204" pitchFamily="49" charset="0"/>
               </a:rPr>
-              <a:t># 2. Read data from a CSV file with a header and create a </a:t>
-            </a:r>
-            <a:r>
-              <a:rPr lang="en-US" sz="1600" dirty="0" err="1">
-                <a:solidFill>
-                  <a:schemeClr val="tx1"/>
-                </a:solidFill>
-                <a:highlight>
-                  <a:srgbClr val="00FF00"/>
-                </a:highlight>
-                <a:latin typeface="Consolas" panose="020B0609020204030204" pitchFamily="49" charset="0"/>
-                <a:cs typeface="Consolas" panose="020B0609020204030204" pitchFamily="49" charset="0"/>
-              </a:rPr>
-              <a:t>DataFrame</a:t>
-            </a:r>
-            <a:r>
-              <a:rPr lang="en-US" sz="1600" dirty="0">
-                <a:solidFill>
-                  <a:schemeClr val="tx1"/>
-                </a:solidFill>
-                <a:highlight>
-                  <a:srgbClr val="00FF00"/>
-                </a:highlight>
-                <a:latin typeface="Consolas" panose="020B0609020204030204" pitchFamily="49" charset="0"/>
-                <a:cs typeface="Consolas" panose="020B0609020204030204" pitchFamily="49" charset="0"/>
-              </a:rPr>
-              <a:t> </a:t>
+              <a:t># 2. Read data from a CSV file with a header and create a DataFrame </a:t>
             </a:r>
           </a:p>
           <a:p>
@@ -21834,31 +22168,8 @@
                 <a:latin typeface="Consolas" panose="020B0609020204030204" pitchFamily="49" charset="0"/>
                 <a:cs typeface="Consolas" panose="020B0609020204030204" pitchFamily="49" charset="0"/>
               </a:rPr>
-              <a:t># 4. Show the first 10 rows of the </a:t>
-            </a:r>
-            <a:r>
-              <a:rPr lang="en-US" sz="1800" dirty="0" err="1">
-                <a:solidFill>
-                  <a:schemeClr val="tx1"/>
-                </a:solidFill>
-                <a:highlight>
-                  <a:srgbClr val="00FF00"/>
-                </a:highlight>
-                <a:latin typeface="Consolas" panose="020B0609020204030204" pitchFamily="49" charset="0"/>
-                <a:cs typeface="Consolas" panose="020B0609020204030204" pitchFamily="49" charset="0"/>
-              </a:rPr>
-              <a:t>DataFrame</a:t>
-            </a:r>
-            <a:endParaRPr lang="en-US" sz="1800" dirty="0">
-              <a:solidFill>
-                <a:schemeClr val="tx1"/>
-              </a:solidFill>
-              <a:highlight>
-                <a:srgbClr val="00FF00"/>
-              </a:highlight>
-              <a:latin typeface="Consolas" panose="020B0609020204030204" pitchFamily="49" charset="0"/>
-              <a:cs typeface="Consolas" panose="020B0609020204030204" pitchFamily="49" charset="0"/>
-            </a:endParaRPr>
+              <a:t># 4. Show the first 10 rows of the DataFrame</a:t>
+            </a:r>
           </a:p>
           <a:p>
             <a:r>
@@ -21928,7 +22239,7 @@
                   <a:srgbClr val="555555"/>
                 </a:solidFill>
               </a:rPr>
-              <a:t>35</a:t>
+              <a:t>36</a:t>
             </a:fld>
             <a:endParaRPr sz="1350">
               <a:solidFill>
@@ -22520,7 +22831,7 @@
 </p:sld>
 </file>
 
-<file path=ppt/slides/slide36.xml><?xml version="1.0" encoding="utf-8"?>
+<file path=ppt/slides/slide37.xml><?xml version="1.0" encoding="utf-8"?>
 <p:sld xmlns:a="http://schemas.openxmlformats.org/drawingml/2006/main" xmlns:r="http://schemas.openxmlformats.org/officeDocument/2006/relationships" xmlns:p="http://schemas.openxmlformats.org/presentationml/2006/main">
   <p:cSld>
     <p:spTree>
@@ -22573,15 +22884,7 @@
           <a:p>
             <a:r>
               <a:rPr lang="en-US" sz="3200" dirty="0"/>
-              <a:t>PySpark </a:t>
-            </a:r>
-            <a:r>
-              <a:rPr lang="en-US" sz="3200" dirty="0" err="1"/>
-              <a:t>DataFrame</a:t>
-            </a:r>
-            <a:r>
-              <a:rPr lang="en-US" sz="3200" dirty="0"/>
-              <a:t> Example-2 -  01</a:t>
+              <a:t>PySpark DataFrame Example-2 -  01</a:t>
             </a:r>
           </a:p>
         </p:txBody>
@@ -23024,7 +23327,7 @@
                   <a:srgbClr val="555555"/>
                 </a:solidFill>
               </a:rPr>
-              <a:t>36</a:t>
+              <a:t>37</a:t>
             </a:fld>
             <a:endParaRPr sz="1350">
               <a:solidFill>
@@ -23469,7 +23772,7 @@
 </p:sld>
 </file>
 
-<file path=ppt/slides/slide37.xml><?xml version="1.0" encoding="utf-8"?>
+<file path=ppt/slides/slide38.xml><?xml version="1.0" encoding="utf-8"?>
 <p:sld xmlns:a="http://schemas.openxmlformats.org/drawingml/2006/main" xmlns:r="http://schemas.openxmlformats.org/officeDocument/2006/relationships" xmlns:p="http://schemas.openxmlformats.org/presentationml/2006/main">
   <p:cSld>
     <p:spTree>
@@ -23522,15 +23825,7 @@
           <a:p>
             <a:r>
               <a:rPr lang="en-US" sz="3200" dirty="0"/>
-              <a:t>PySpark </a:t>
-            </a:r>
-            <a:r>
-              <a:rPr lang="en-US" sz="3200" dirty="0" err="1"/>
-              <a:t>DataFrame</a:t>
-            </a:r>
-            <a:r>
-              <a:rPr lang="en-US" sz="3200" dirty="0"/>
-              <a:t> Example-2 - 02</a:t>
+              <a:t>PySpark DataFrame Example-2 - 02</a:t>
             </a:r>
           </a:p>
         </p:txBody>
@@ -23997,7 +24292,7 @@
                   <a:srgbClr val="555555"/>
                 </a:solidFill>
               </a:rPr>
-              <a:t>37</a:t>
+              <a:t>38</a:t>
             </a:fld>
             <a:endParaRPr sz="1350">
               <a:solidFill>
@@ -24589,7 +24884,7 @@
 </p:sld>
 </file>
 
-<file path=ppt/slides/slide38.xml><?xml version="1.0" encoding="utf-8"?>
+<file path=ppt/slides/slide39.xml><?xml version="1.0" encoding="utf-8"?>
 <p:sld xmlns:a="http://schemas.openxmlformats.org/drawingml/2006/main" xmlns:r="http://schemas.openxmlformats.org/officeDocument/2006/relationships" xmlns:p="http://schemas.openxmlformats.org/presentationml/2006/main">
   <p:cSld>
     <p:spTree>
@@ -24642,15 +24937,7 @@
           <a:p>
             <a:r>
               <a:rPr lang="en-US" sz="3200" dirty="0"/>
-              <a:t>PySpark </a:t>
-            </a:r>
-            <a:r>
-              <a:rPr lang="en-US" sz="3200" dirty="0" err="1"/>
-              <a:t>DataFrame</a:t>
-            </a:r>
-            <a:r>
-              <a:rPr lang="en-US" sz="3200" dirty="0"/>
-              <a:t> Example-2 - 03</a:t>
+              <a:t>PySpark DataFrame Example-2 - 03</a:t>
             </a:r>
           </a:p>
         </p:txBody>
@@ -24694,33 +24981,7 @@
                 <a:latin typeface="Consolas" panose="020B0609020204030204" pitchFamily="49" charset="0"/>
                 <a:cs typeface="Consolas" panose="020B0609020204030204" pitchFamily="49" charset="0"/>
               </a:rPr>
-              <a:t># 4. Create a </a:t>
-            </a:r>
-            <a:r>
-              <a:rPr lang="en-US" dirty="0" err="1">
-                <a:solidFill>
-                  <a:schemeClr val="tx1"/>
-                </a:solidFill>
-                <a:highlight>
-                  <a:srgbClr val="FFFF00"/>
-                </a:highlight>
-                <a:latin typeface="Consolas" panose="020B0609020204030204" pitchFamily="49" charset="0"/>
-                <a:cs typeface="Consolas" panose="020B0609020204030204" pitchFamily="49" charset="0"/>
-              </a:rPr>
-              <a:t>DataFrame</a:t>
-            </a:r>
-            <a:r>
-              <a:rPr lang="en-US" dirty="0">
-                <a:solidFill>
-                  <a:schemeClr val="tx1"/>
-                </a:solidFill>
-                <a:highlight>
-                  <a:srgbClr val="FFFF00"/>
-                </a:highlight>
-                <a:latin typeface="Consolas" panose="020B0609020204030204" pitchFamily="49" charset="0"/>
-                <a:cs typeface="Consolas" panose="020B0609020204030204" pitchFamily="49" charset="0"/>
-              </a:rPr>
-              <a:t> </a:t>
+              <a:t># 4. Create a DataFrame </a:t>
             </a:r>
           </a:p>
           <a:p>
@@ -25230,7 +25491,7 @@
                   <a:srgbClr val="555555"/>
                 </a:solidFill>
               </a:rPr>
-              <a:t>38</a:t>
+              <a:t>39</a:t>
             </a:fld>
             <a:endParaRPr sz="1350">
               <a:solidFill>
@@ -26067,7 +26328,880 @@
 </p:sld>
 </file>
 
-<file path=ppt/slides/slide39.xml><?xml version="1.0" encoding="utf-8"?>
+<file path=ppt/slides/slide4.xml><?xml version="1.0" encoding="utf-8"?>
+<p:sld xmlns:a="http://schemas.openxmlformats.org/drawingml/2006/main" xmlns:r="http://schemas.openxmlformats.org/officeDocument/2006/relationships" xmlns:p="http://schemas.openxmlformats.org/presentationml/2006/main">
+  <p:cSld>
+    <p:spTree>
+      <p:nvGrpSpPr>
+        <p:cNvPr id="1" name="">
+          <a:extLst>
+            <a:ext uri="{FF2B5EF4-FFF2-40B4-BE49-F238E27FC236}">
+              <a16:creationId xmlns:a16="http://schemas.microsoft.com/office/drawing/2014/main" id="{E15F8F14-B0A6-8471-A8BF-4EB9794682F5}"/>
+            </a:ext>
+          </a:extLst>
+        </p:cNvPr>
+        <p:cNvGrpSpPr/>
+        <p:nvPr/>
+      </p:nvGrpSpPr>
+      <p:grpSpPr>
+        <a:xfrm>
+          <a:off x="0" y="0"/>
+          <a:ext cx="0" cy="0"/>
+          <a:chOff x="0" y="0"/>
+          <a:chExt cx="0" cy="0"/>
+        </a:xfrm>
+      </p:grpSpPr>
+      <p:sp>
+        <p:nvSpPr>
+          <p:cNvPr id="2" name="Title 1">
+            <a:extLst>
+              <a:ext uri="{FF2B5EF4-FFF2-40B4-BE49-F238E27FC236}">
+                <a16:creationId xmlns:a16="http://schemas.microsoft.com/office/drawing/2014/main" id="{4FEEC0D2-3D42-409E-6E8A-3022A7934564}"/>
+              </a:ext>
+            </a:extLst>
+          </p:cNvPr>
+          <p:cNvSpPr>
+            <a:spLocks noGrp="1"/>
+          </p:cNvSpPr>
+          <p:nvPr>
+            <p:ph type="ctrTitle"/>
+          </p:nvPr>
+        </p:nvSpPr>
+        <p:spPr>
+          <a:xfrm>
+            <a:off x="1413468" y="290725"/>
+            <a:ext cx="9144000" cy="583482"/>
+          </a:xfrm>
+        </p:spPr>
+        <p:txBody>
+          <a:bodyPr>
+            <a:normAutofit fontScale="90000"/>
+          </a:bodyPr>
+          <a:lstStyle/>
+          <a:p>
+            <a:r>
+              <a:rPr lang="en-US" sz="3600" dirty="0"/>
+              <a:t>What is a Big Data Modeling?</a:t>
+            </a:r>
+          </a:p>
+        </p:txBody>
+      </p:sp>
+      <p:sp>
+        <p:nvSpPr>
+          <p:cNvPr id="3" name="Subtitle 2">
+            <a:extLst>
+              <a:ext uri="{FF2B5EF4-FFF2-40B4-BE49-F238E27FC236}">
+                <a16:creationId xmlns:a16="http://schemas.microsoft.com/office/drawing/2014/main" id="{EC353BF7-8743-7C25-95E3-4E6ADA5D6666}"/>
+              </a:ext>
+            </a:extLst>
+          </p:cNvPr>
+          <p:cNvSpPr>
+            <a:spLocks noGrp="1"/>
+          </p:cNvSpPr>
+          <p:nvPr>
+            <p:ph type="subTitle" idx="1"/>
+          </p:nvPr>
+        </p:nvSpPr>
+        <p:spPr>
+          <a:xfrm>
+            <a:off x="1307184" y="1225900"/>
+            <a:ext cx="9144000" cy="4983188"/>
+          </a:xfrm>
+        </p:spPr>
+        <p:txBody>
+          <a:bodyPr>
+            <a:normAutofit fontScale="70000" lnSpcReduction="20000"/>
+          </a:bodyPr>
+          <a:lstStyle/>
+          <a:p>
+            <a:r>
+              <a:rPr lang="en-US" sz="3600" dirty="0">
+                <a:solidFill>
+                  <a:srgbClr val="C00000"/>
+                </a:solidFill>
+              </a:rPr>
+              <a:t>Big data modeling  </a:t>
+            </a:r>
+            <a:r>
+              <a:rPr lang="en-US" sz="3600" dirty="0">
+                <a:solidFill>
+                  <a:schemeClr val="tx1"/>
+                </a:solidFill>
+              </a:rPr>
+              <a:t>is the process of </a:t>
+            </a:r>
+            <a:r>
+              <a:rPr lang="en-US" sz="3600" dirty="0">
+                <a:solidFill>
+                  <a:srgbClr val="00B0F0"/>
+                </a:solidFill>
+              </a:rPr>
+              <a:t>organizing large</a:t>
+            </a:r>
+            <a:r>
+              <a:rPr lang="en-US" sz="3600" dirty="0">
+                <a:solidFill>
+                  <a:schemeClr val="tx1"/>
+                </a:solidFill>
+              </a:rPr>
+              <a:t>, </a:t>
+            </a:r>
+          </a:p>
+          <a:p>
+            <a:r>
+              <a:rPr lang="en-US" sz="3600" dirty="0">
+                <a:solidFill>
+                  <a:srgbClr val="00B0F0"/>
+                </a:solidFill>
+              </a:rPr>
+              <a:t>fast-moving</a:t>
+            </a:r>
+            <a:r>
+              <a:rPr lang="en-US" sz="3600" dirty="0">
+                <a:solidFill>
+                  <a:schemeClr val="tx1"/>
+                </a:solidFill>
+              </a:rPr>
+              <a:t>, and </a:t>
+            </a:r>
+            <a:r>
+              <a:rPr lang="en-US" sz="3600" dirty="0">
+                <a:solidFill>
+                  <a:srgbClr val="00B0F0"/>
+                </a:solidFill>
+              </a:rPr>
+              <a:t>diverse datasets </a:t>
+            </a:r>
+            <a:r>
+              <a:rPr lang="en-US" sz="3600" dirty="0">
+                <a:solidFill>
+                  <a:schemeClr val="tx1"/>
+                </a:solidFill>
+              </a:rPr>
+              <a:t>so they can be </a:t>
+            </a:r>
+            <a:r>
+              <a:rPr lang="en-US" sz="3600" dirty="0">
+                <a:solidFill>
+                  <a:srgbClr val="00B050"/>
+                </a:solidFill>
+              </a:rPr>
+              <a:t>stored</a:t>
+            </a:r>
+            <a:r>
+              <a:rPr lang="en-US" sz="3600" dirty="0">
+                <a:solidFill>
+                  <a:schemeClr val="tx1"/>
+                </a:solidFill>
+              </a:rPr>
+              <a:t>, </a:t>
+            </a:r>
+          </a:p>
+          <a:p>
+            <a:r>
+              <a:rPr lang="en-US" sz="3600" dirty="0">
+                <a:solidFill>
+                  <a:srgbClr val="00B050"/>
+                </a:solidFill>
+              </a:rPr>
+              <a:t>processed</a:t>
+            </a:r>
+            <a:r>
+              <a:rPr lang="en-US" sz="3600" dirty="0">
+                <a:solidFill>
+                  <a:schemeClr val="tx1"/>
+                </a:solidFill>
+              </a:rPr>
+              <a:t>, </a:t>
+            </a:r>
+            <a:r>
+              <a:rPr lang="en-US" sz="3600" dirty="0">
+                <a:solidFill>
+                  <a:srgbClr val="00B050"/>
+                </a:solidFill>
+              </a:rPr>
+              <a:t>analyzed</a:t>
+            </a:r>
+            <a:r>
+              <a:rPr lang="en-US" sz="3600" dirty="0">
+                <a:solidFill>
+                  <a:schemeClr val="tx1"/>
+                </a:solidFill>
+              </a:rPr>
+              <a:t>, and </a:t>
+            </a:r>
+            <a:r>
+              <a:rPr lang="en-US" sz="3600" dirty="0">
+                <a:solidFill>
+                  <a:srgbClr val="00B050"/>
+                </a:solidFill>
+              </a:rPr>
+              <a:t>understood</a:t>
+            </a:r>
+            <a:r>
+              <a:rPr lang="en-US" sz="3600" dirty="0">
+                <a:solidFill>
+                  <a:schemeClr val="tx1"/>
+                </a:solidFill>
+              </a:rPr>
+              <a:t> efficiently.</a:t>
+            </a:r>
+          </a:p>
+          <a:p>
+            <a:endParaRPr lang="en-US" sz="3600" dirty="0"/>
+          </a:p>
+          <a:p>
+            <a:r>
+              <a:rPr lang="en-US" sz="3600" b="1" u="sng" dirty="0"/>
+              <a:t>Key Characteristics of Big Data:</a:t>
+            </a:r>
+            <a:endParaRPr lang="en-US" sz="3600" b="1" u="sng" dirty="0">
+              <a:solidFill>
+                <a:schemeClr val="tx1"/>
+              </a:solidFill>
+            </a:endParaRPr>
+          </a:p>
+          <a:p>
+            <a:r>
+              <a:rPr lang="en-US" sz="3600" dirty="0">
+                <a:solidFill>
+                  <a:srgbClr val="00B0F0"/>
+                </a:solidFill>
+              </a:rPr>
+              <a:t>1. Volume</a:t>
+            </a:r>
+            <a:r>
+              <a:rPr lang="en-US" sz="3600" dirty="0">
+                <a:solidFill>
+                  <a:schemeClr val="tx1"/>
+                </a:solidFill>
+              </a:rPr>
+              <a:t>: Handles massive amounts of data</a:t>
+            </a:r>
+          </a:p>
+          <a:p>
+            <a:r>
+              <a:rPr lang="en-US" sz="3600" dirty="0">
+                <a:solidFill>
+                  <a:srgbClr val="00B0F0"/>
+                </a:solidFill>
+              </a:rPr>
+              <a:t>2. Velocity</a:t>
+            </a:r>
+            <a:r>
+              <a:rPr lang="en-US" sz="3600" dirty="0">
+                <a:solidFill>
+                  <a:schemeClr val="tx1"/>
+                </a:solidFill>
+              </a:rPr>
+              <a:t>: Supports rapidly generated and processed data</a:t>
+            </a:r>
+          </a:p>
+          <a:p>
+            <a:r>
+              <a:rPr lang="en-US" sz="3600" dirty="0">
+                <a:solidFill>
+                  <a:srgbClr val="00B0F0"/>
+                </a:solidFill>
+              </a:rPr>
+              <a:t>3. Variety</a:t>
+            </a:r>
+            <a:r>
+              <a:rPr lang="en-US" sz="3600" dirty="0">
+                <a:solidFill>
+                  <a:schemeClr val="tx1"/>
+                </a:solidFill>
+              </a:rPr>
+              <a:t>: Combines structured, semi-structured, and unstructured data</a:t>
+            </a:r>
+          </a:p>
+          <a:p>
+            <a:r>
+              <a:rPr lang="en-US" sz="3600" dirty="0">
+                <a:solidFill>
+                  <a:srgbClr val="00B0F0"/>
+                </a:solidFill>
+              </a:rPr>
+              <a:t>4. Veracity</a:t>
+            </a:r>
+            <a:r>
+              <a:rPr lang="en-US" sz="3600" dirty="0">
+                <a:solidFill>
+                  <a:schemeClr val="tx1"/>
+                </a:solidFill>
+              </a:rPr>
+              <a:t>: The quality, reliability, and trust of the data</a:t>
+            </a:r>
+          </a:p>
+          <a:p>
+            <a:r>
+              <a:rPr lang="en-US" sz="3600" dirty="0">
+                <a:solidFill>
+                  <a:srgbClr val="00B0F0"/>
+                </a:solidFill>
+              </a:rPr>
+              <a:t>5. Scalability</a:t>
+            </a:r>
+            <a:r>
+              <a:rPr lang="en-US" sz="3600" dirty="0">
+                <a:solidFill>
+                  <a:schemeClr val="tx1"/>
+                </a:solidFill>
+              </a:rPr>
+              <a:t>: Adapts as data and user demand grow</a:t>
+            </a:r>
+          </a:p>
+          <a:p>
+            <a:endParaRPr lang="en-US" sz="3600" dirty="0"/>
+          </a:p>
+          <a:p>
+            <a:pPr marL="800100" lvl="1" indent="-342900" algn="l">
+              <a:buFont typeface="+mj-lt"/>
+              <a:buAutoNum type="arabicPeriod"/>
+            </a:pPr>
+            <a:endParaRPr lang="en-US" sz="1200" dirty="0"/>
+          </a:p>
+        </p:txBody>
+      </p:sp>
+      <p:sp>
+        <p:nvSpPr>
+          <p:cNvPr id="4" name="Slide Number">
+            <a:extLst>
+              <a:ext uri="{FF2B5EF4-FFF2-40B4-BE49-F238E27FC236}">
+                <a16:creationId xmlns:a16="http://schemas.microsoft.com/office/drawing/2014/main" id="{90295111-642A-45CA-B8EA-9089545A24F5}"/>
+              </a:ext>
+            </a:extLst>
+          </p:cNvPr>
+          <p:cNvSpPr>
+            <a:spLocks noGrp="1"/>
+          </p:cNvSpPr>
+          <p:nvPr/>
+        </p:nvSpPr>
+        <p:spPr>
+          <a:xfrm>
+            <a:off x="11334750" y="6457950"/>
+            <a:ext cx="571500" cy="266700"/>
+          </a:xfrm>
+          <a:prstGeom prst="rect">
+            <a:avLst/>
+          </a:prstGeom>
+          <a:noFill/>
+          <a:ln w="0">
+            <a:noFill/>
+          </a:ln>
+        </p:spPr>
+        <p:txBody>
+          <a:bodyPr/>
+          <a:lstStyle/>
+          <a:p>
+            <a:pPr algn="r">
+              <a:defRPr sz="1350">
+                <a:solidFill>
+                  <a:srgbClr val="555555"/>
+                </a:solidFill>
+              </a:defRPr>
+            </a:pPr>
+            <a:fld id="{1D2C215F-622A-4B6A-98C5-30662BEA2626}" type="slidenum">
+              <a:rPr sz="1350">
+                <a:solidFill>
+                  <a:srgbClr val="555555"/>
+                </a:solidFill>
+              </a:rPr>
+              <a:t>4</a:t>
+            </a:fld>
+            <a:endParaRPr sz="1350">
+              <a:solidFill>
+                <a:srgbClr val="555555"/>
+              </a:solidFill>
+            </a:endParaRPr>
+          </a:p>
+        </p:txBody>
+      </p:sp>
+    </p:spTree>
+    <p:extLst>
+      <p:ext uri="{BB962C8B-B14F-4D97-AF65-F5344CB8AC3E}">
+        <p14:creationId xmlns:p14="http://schemas.microsoft.com/office/powerpoint/2010/main" val="614690070"/>
+      </p:ext>
+    </p:extLst>
+  </p:cSld>
+  <p:clrMapOvr>
+    <a:masterClrMapping/>
+  </p:clrMapOvr>
+  <p:timing>
+    <p:tnLst>
+      <p:par>
+        <p:cTn id="1" dur="indefinite" restart="never" nodeType="tmRoot">
+          <p:childTnLst>
+            <p:seq concurrent="1" nextAc="seek">
+              <p:cTn id="2" dur="indefinite" nodeType="mainSeq">
+                <p:childTnLst>
+                  <p:par>
+                    <p:cTn id="3" fill="hold">
+                      <p:stCondLst>
+                        <p:cond delay="indefinite"/>
+                      </p:stCondLst>
+                      <p:childTnLst>
+                        <p:par>
+                          <p:cTn id="4" fill="hold">
+                            <p:stCondLst>
+                              <p:cond delay="0"/>
+                            </p:stCondLst>
+                            <p:childTnLst>
+                              <p:par>
+                                <p:cTn id="5" presetID="1" presetClass="entr" presetSubtype="0" fill="hold" nodeType="clickEffect">
+                                  <p:stCondLst>
+                                    <p:cond delay="0"/>
+                                  </p:stCondLst>
+                                  <p:childTnLst>
+                                    <p:set>
+                                      <p:cBhvr>
+                                        <p:cTn id="6" dur="1" fill="hold">
+                                          <p:stCondLst>
+                                            <p:cond delay="0"/>
+                                          </p:stCondLst>
+                                        </p:cTn>
+                                        <p:tgtEl>
+                                          <p:spTgt spid="3">
+                                            <p:txEl>
+                                              <p:pRg st="0" end="0"/>
+                                            </p:txEl>
+                                          </p:spTgt>
+                                        </p:tgtEl>
+                                        <p:attrNameLst>
+                                          <p:attrName>style.visibility</p:attrName>
+                                        </p:attrNameLst>
+                                      </p:cBhvr>
+                                      <p:to>
+                                        <p:strVal val="visible"/>
+                                      </p:to>
+                                    </p:set>
+                                  </p:childTnLst>
+                                </p:cTn>
+                              </p:par>
+                            </p:childTnLst>
+                          </p:cTn>
+                        </p:par>
+                      </p:childTnLst>
+                    </p:cTn>
+                  </p:par>
+                  <p:par>
+                    <p:cTn id="7" fill="hold">
+                      <p:stCondLst>
+                        <p:cond delay="indefinite"/>
+                      </p:stCondLst>
+                      <p:childTnLst>
+                        <p:par>
+                          <p:cTn id="8" fill="hold">
+                            <p:stCondLst>
+                              <p:cond delay="0"/>
+                            </p:stCondLst>
+                            <p:childTnLst>
+                              <p:par>
+                                <p:cTn id="9" presetID="1" presetClass="entr" presetSubtype="0" fill="hold" nodeType="clickEffect">
+                                  <p:stCondLst>
+                                    <p:cond delay="0"/>
+                                  </p:stCondLst>
+                                  <p:childTnLst>
+                                    <p:set>
+                                      <p:cBhvr>
+                                        <p:cTn id="10" dur="1" fill="hold">
+                                          <p:stCondLst>
+                                            <p:cond delay="0"/>
+                                          </p:stCondLst>
+                                        </p:cTn>
+                                        <p:tgtEl>
+                                          <p:spTgt spid="3">
+                                            <p:txEl>
+                                              <p:pRg st="1" end="1"/>
+                                            </p:txEl>
+                                          </p:spTgt>
+                                        </p:tgtEl>
+                                        <p:attrNameLst>
+                                          <p:attrName>style.visibility</p:attrName>
+                                        </p:attrNameLst>
+                                      </p:cBhvr>
+                                      <p:to>
+                                        <p:strVal val="visible"/>
+                                      </p:to>
+                                    </p:set>
+                                  </p:childTnLst>
+                                </p:cTn>
+                              </p:par>
+                            </p:childTnLst>
+                          </p:cTn>
+                        </p:par>
+                      </p:childTnLst>
+                    </p:cTn>
+                  </p:par>
+                  <p:par>
+                    <p:cTn id="11" fill="hold">
+                      <p:stCondLst>
+                        <p:cond delay="indefinite"/>
+                      </p:stCondLst>
+                      <p:childTnLst>
+                        <p:par>
+                          <p:cTn id="12" fill="hold">
+                            <p:stCondLst>
+                              <p:cond delay="0"/>
+                            </p:stCondLst>
+                            <p:childTnLst>
+                              <p:par>
+                                <p:cTn id="13" presetID="1" presetClass="entr" presetSubtype="0" fill="hold" nodeType="clickEffect">
+                                  <p:stCondLst>
+                                    <p:cond delay="0"/>
+                                  </p:stCondLst>
+                                  <p:childTnLst>
+                                    <p:set>
+                                      <p:cBhvr>
+                                        <p:cTn id="14" dur="1" fill="hold">
+                                          <p:stCondLst>
+                                            <p:cond delay="0"/>
+                                          </p:stCondLst>
+                                        </p:cTn>
+                                        <p:tgtEl>
+                                          <p:spTgt spid="3">
+                                            <p:txEl>
+                                              <p:pRg st="2" end="2"/>
+                                            </p:txEl>
+                                          </p:spTgt>
+                                        </p:tgtEl>
+                                        <p:attrNameLst>
+                                          <p:attrName>style.visibility</p:attrName>
+                                        </p:attrNameLst>
+                                      </p:cBhvr>
+                                      <p:to>
+                                        <p:strVal val="visible"/>
+                                      </p:to>
+                                    </p:set>
+                                  </p:childTnLst>
+                                </p:cTn>
+                              </p:par>
+                            </p:childTnLst>
+                          </p:cTn>
+                        </p:par>
+                      </p:childTnLst>
+                    </p:cTn>
+                  </p:par>
+                  <p:par>
+                    <p:cTn id="15" fill="hold">
+                      <p:stCondLst>
+                        <p:cond delay="indefinite"/>
+                      </p:stCondLst>
+                      <p:childTnLst>
+                        <p:par>
+                          <p:cTn id="16" fill="hold">
+                            <p:stCondLst>
+                              <p:cond delay="0"/>
+                            </p:stCondLst>
+                            <p:childTnLst>
+                              <p:par>
+                                <p:cTn id="17" presetID="1" presetClass="entr" presetSubtype="0" fill="hold" nodeType="clickEffect">
+                                  <p:stCondLst>
+                                    <p:cond delay="0"/>
+                                  </p:stCondLst>
+                                  <p:childTnLst>
+                                    <p:set>
+                                      <p:cBhvr>
+                                        <p:cTn id="18" dur="1" fill="hold">
+                                          <p:stCondLst>
+                                            <p:cond delay="0"/>
+                                          </p:stCondLst>
+                                        </p:cTn>
+                                        <p:tgtEl>
+                                          <p:spTgt spid="3">
+                                            <p:txEl>
+                                              <p:pRg st="4" end="4"/>
+                                            </p:txEl>
+                                          </p:spTgt>
+                                        </p:tgtEl>
+                                        <p:attrNameLst>
+                                          <p:attrName>style.visibility</p:attrName>
+                                        </p:attrNameLst>
+                                      </p:cBhvr>
+                                      <p:to>
+                                        <p:strVal val="visible"/>
+                                      </p:to>
+                                    </p:set>
+                                  </p:childTnLst>
+                                </p:cTn>
+                              </p:par>
+                            </p:childTnLst>
+                          </p:cTn>
+                        </p:par>
+                      </p:childTnLst>
+                    </p:cTn>
+                  </p:par>
+                  <p:par>
+                    <p:cTn id="19" fill="hold">
+                      <p:stCondLst>
+                        <p:cond delay="indefinite"/>
+                      </p:stCondLst>
+                      <p:childTnLst>
+                        <p:par>
+                          <p:cTn id="20" fill="hold">
+                            <p:stCondLst>
+                              <p:cond delay="0"/>
+                            </p:stCondLst>
+                            <p:childTnLst>
+                              <p:par>
+                                <p:cTn id="21" presetID="1" presetClass="entr" presetSubtype="0" fill="hold" nodeType="clickEffect">
+                                  <p:stCondLst>
+                                    <p:cond delay="0"/>
+                                  </p:stCondLst>
+                                  <p:childTnLst>
+                                    <p:set>
+                                      <p:cBhvr>
+                                        <p:cTn id="22" dur="1" fill="hold">
+                                          <p:stCondLst>
+                                            <p:cond delay="0"/>
+                                          </p:stCondLst>
+                                        </p:cTn>
+                                        <p:tgtEl>
+                                          <p:spTgt spid="3">
+                                            <p:txEl>
+                                              <p:pRg st="5" end="5"/>
+                                            </p:txEl>
+                                          </p:spTgt>
+                                        </p:tgtEl>
+                                        <p:attrNameLst>
+                                          <p:attrName>style.visibility</p:attrName>
+                                        </p:attrNameLst>
+                                      </p:cBhvr>
+                                      <p:to>
+                                        <p:strVal val="visible"/>
+                                      </p:to>
+                                    </p:set>
+                                  </p:childTnLst>
+                                </p:cTn>
+                              </p:par>
+                            </p:childTnLst>
+                          </p:cTn>
+                        </p:par>
+                      </p:childTnLst>
+                    </p:cTn>
+                  </p:par>
+                  <p:par>
+                    <p:cTn id="23" fill="hold">
+                      <p:stCondLst>
+                        <p:cond delay="indefinite"/>
+                      </p:stCondLst>
+                      <p:childTnLst>
+                        <p:par>
+                          <p:cTn id="24" fill="hold">
+                            <p:stCondLst>
+                              <p:cond delay="0"/>
+                            </p:stCondLst>
+                            <p:childTnLst>
+                              <p:par>
+                                <p:cTn id="25" presetID="1" presetClass="entr" presetSubtype="0" fill="hold" nodeType="clickEffect">
+                                  <p:stCondLst>
+                                    <p:cond delay="0"/>
+                                  </p:stCondLst>
+                                  <p:childTnLst>
+                                    <p:set>
+                                      <p:cBhvr>
+                                        <p:cTn id="26" dur="1" fill="hold">
+                                          <p:stCondLst>
+                                            <p:cond delay="0"/>
+                                          </p:stCondLst>
+                                        </p:cTn>
+                                        <p:tgtEl>
+                                          <p:spTgt spid="3">
+                                            <p:txEl>
+                                              <p:pRg st="6" end="6"/>
+                                            </p:txEl>
+                                          </p:spTgt>
+                                        </p:tgtEl>
+                                        <p:attrNameLst>
+                                          <p:attrName>style.visibility</p:attrName>
+                                        </p:attrNameLst>
+                                      </p:cBhvr>
+                                      <p:to>
+                                        <p:strVal val="visible"/>
+                                      </p:to>
+                                    </p:set>
+                                  </p:childTnLst>
+                                </p:cTn>
+                              </p:par>
+                            </p:childTnLst>
+                          </p:cTn>
+                        </p:par>
+                      </p:childTnLst>
+                    </p:cTn>
+                  </p:par>
+                  <p:par>
+                    <p:cTn id="27" fill="hold">
+                      <p:stCondLst>
+                        <p:cond delay="indefinite"/>
+                      </p:stCondLst>
+                      <p:childTnLst>
+                        <p:par>
+                          <p:cTn id="28" fill="hold">
+                            <p:stCondLst>
+                              <p:cond delay="0"/>
+                            </p:stCondLst>
+                            <p:childTnLst>
+                              <p:par>
+                                <p:cTn id="29" presetID="1" presetClass="entr" presetSubtype="0" fill="hold" nodeType="clickEffect">
+                                  <p:stCondLst>
+                                    <p:cond delay="0"/>
+                                  </p:stCondLst>
+                                  <p:childTnLst>
+                                    <p:set>
+                                      <p:cBhvr>
+                                        <p:cTn id="30" dur="1" fill="hold">
+                                          <p:stCondLst>
+                                            <p:cond delay="0"/>
+                                          </p:stCondLst>
+                                        </p:cTn>
+                                        <p:tgtEl>
+                                          <p:spTgt spid="3">
+                                            <p:txEl>
+                                              <p:pRg st="7" end="7"/>
+                                            </p:txEl>
+                                          </p:spTgt>
+                                        </p:tgtEl>
+                                        <p:attrNameLst>
+                                          <p:attrName>style.visibility</p:attrName>
+                                        </p:attrNameLst>
+                                      </p:cBhvr>
+                                      <p:to>
+                                        <p:strVal val="visible"/>
+                                      </p:to>
+                                    </p:set>
+                                  </p:childTnLst>
+                                </p:cTn>
+                              </p:par>
+                            </p:childTnLst>
+                          </p:cTn>
+                        </p:par>
+                      </p:childTnLst>
+                    </p:cTn>
+                  </p:par>
+                  <p:par>
+                    <p:cTn id="31" fill="hold">
+                      <p:stCondLst>
+                        <p:cond delay="indefinite"/>
+                      </p:stCondLst>
+                      <p:childTnLst>
+                        <p:par>
+                          <p:cTn id="32" fill="hold">
+                            <p:stCondLst>
+                              <p:cond delay="0"/>
+                            </p:stCondLst>
+                            <p:childTnLst>
+                              <p:par>
+                                <p:cTn id="33" presetID="1" presetClass="entr" presetSubtype="0" fill="hold" nodeType="clickEffect">
+                                  <p:stCondLst>
+                                    <p:cond delay="0"/>
+                                  </p:stCondLst>
+                                  <p:childTnLst>
+                                    <p:set>
+                                      <p:cBhvr>
+                                        <p:cTn id="34" dur="1" fill="hold">
+                                          <p:stCondLst>
+                                            <p:cond delay="0"/>
+                                          </p:stCondLst>
+                                        </p:cTn>
+                                        <p:tgtEl>
+                                          <p:spTgt spid="3">
+                                            <p:txEl>
+                                              <p:pRg st="8" end="8"/>
+                                            </p:txEl>
+                                          </p:spTgt>
+                                        </p:tgtEl>
+                                        <p:attrNameLst>
+                                          <p:attrName>style.visibility</p:attrName>
+                                        </p:attrNameLst>
+                                      </p:cBhvr>
+                                      <p:to>
+                                        <p:strVal val="visible"/>
+                                      </p:to>
+                                    </p:set>
+                                  </p:childTnLst>
+                                </p:cTn>
+                              </p:par>
+                            </p:childTnLst>
+                          </p:cTn>
+                        </p:par>
+                      </p:childTnLst>
+                    </p:cTn>
+                  </p:par>
+                  <p:par>
+                    <p:cTn id="35" fill="hold">
+                      <p:stCondLst>
+                        <p:cond delay="indefinite"/>
+                      </p:stCondLst>
+                      <p:childTnLst>
+                        <p:par>
+                          <p:cTn id="36" fill="hold">
+                            <p:stCondLst>
+                              <p:cond delay="0"/>
+                            </p:stCondLst>
+                            <p:childTnLst>
+                              <p:par>
+                                <p:cTn id="37" presetID="1" presetClass="entr" presetSubtype="0" fill="hold" nodeType="clickEffect">
+                                  <p:stCondLst>
+                                    <p:cond delay="0"/>
+                                  </p:stCondLst>
+                                  <p:childTnLst>
+                                    <p:set>
+                                      <p:cBhvr>
+                                        <p:cTn id="38" dur="1" fill="hold">
+                                          <p:stCondLst>
+                                            <p:cond delay="0"/>
+                                          </p:stCondLst>
+                                        </p:cTn>
+                                        <p:tgtEl>
+                                          <p:spTgt spid="3">
+                                            <p:txEl>
+                                              <p:pRg st="9" end="9"/>
+                                            </p:txEl>
+                                          </p:spTgt>
+                                        </p:tgtEl>
+                                        <p:attrNameLst>
+                                          <p:attrName>style.visibility</p:attrName>
+                                        </p:attrNameLst>
+                                      </p:cBhvr>
+                                      <p:to>
+                                        <p:strVal val="visible"/>
+                                      </p:to>
+                                    </p:set>
+                                  </p:childTnLst>
+                                </p:cTn>
+                              </p:par>
+                            </p:childTnLst>
+                          </p:cTn>
+                        </p:par>
+                      </p:childTnLst>
+                    </p:cTn>
+                  </p:par>
+                </p:childTnLst>
+              </p:cTn>
+              <p:prevCondLst>
+                <p:cond evt="onPrev" delay="0">
+                  <p:tgtEl>
+                    <p:sldTgt/>
+                  </p:tgtEl>
+                </p:cond>
+              </p:prevCondLst>
+              <p:nextCondLst>
+                <p:cond evt="onNext" delay="0">
+                  <p:tgtEl>
+                    <p:sldTgt/>
+                  </p:tgtEl>
+                </p:cond>
+              </p:nextCondLst>
+            </p:seq>
+          </p:childTnLst>
+        </p:cTn>
+      </p:par>
+    </p:tnLst>
+  </p:timing>
+</p:sld>
+</file>
+
+<file path=ppt/slides/slide40.xml><?xml version="1.0" encoding="utf-8"?>
 <p:sld xmlns:a="http://schemas.openxmlformats.org/drawingml/2006/main" xmlns:r="http://schemas.openxmlformats.org/officeDocument/2006/relationships" xmlns:p="http://schemas.openxmlformats.org/presentationml/2006/main">
   <p:cSld>
     <p:spTree>
@@ -26120,15 +27254,7 @@
           <a:p>
             <a:r>
               <a:rPr lang="en-US" sz="3200" dirty="0"/>
-              <a:t>PySpark </a:t>
-            </a:r>
-            <a:r>
-              <a:rPr lang="en-US" sz="3200" dirty="0" err="1"/>
-              <a:t>DataFrame</a:t>
-            </a:r>
-            <a:r>
-              <a:rPr lang="en-US" sz="3200" dirty="0"/>
-              <a:t> Example-2 - 04</a:t>
+              <a:t>PySpark DataFrame Example-2 - 04</a:t>
             </a:r>
           </a:p>
         </p:txBody>
@@ -26569,7 +27695,7 @@
                   <a:srgbClr val="555555"/>
                 </a:solidFill>
               </a:rPr>
-              <a:t>39</a:t>
+              <a:t>40</a:t>
             </a:fld>
             <a:endParaRPr sz="1350">
               <a:solidFill>
@@ -27357,880 +28483,7 @@
 </p:sld>
 </file>
 
-<file path=ppt/slides/slide4.xml><?xml version="1.0" encoding="utf-8"?>
-<p:sld xmlns:a="http://schemas.openxmlformats.org/drawingml/2006/main" xmlns:r="http://schemas.openxmlformats.org/officeDocument/2006/relationships" xmlns:p="http://schemas.openxmlformats.org/presentationml/2006/main">
-  <p:cSld>
-    <p:spTree>
-      <p:nvGrpSpPr>
-        <p:cNvPr id="1" name="">
-          <a:extLst>
-            <a:ext uri="{FF2B5EF4-FFF2-40B4-BE49-F238E27FC236}">
-              <a16:creationId xmlns:a16="http://schemas.microsoft.com/office/drawing/2014/main" id="{E15F8F14-B0A6-8471-A8BF-4EB9794682F5}"/>
-            </a:ext>
-          </a:extLst>
-        </p:cNvPr>
-        <p:cNvGrpSpPr/>
-        <p:nvPr/>
-      </p:nvGrpSpPr>
-      <p:grpSpPr>
-        <a:xfrm>
-          <a:off x="0" y="0"/>
-          <a:ext cx="0" cy="0"/>
-          <a:chOff x="0" y="0"/>
-          <a:chExt cx="0" cy="0"/>
-        </a:xfrm>
-      </p:grpSpPr>
-      <p:sp>
-        <p:nvSpPr>
-          <p:cNvPr id="2" name="Title 1">
-            <a:extLst>
-              <a:ext uri="{FF2B5EF4-FFF2-40B4-BE49-F238E27FC236}">
-                <a16:creationId xmlns:a16="http://schemas.microsoft.com/office/drawing/2014/main" id="{4FEEC0D2-3D42-409E-6E8A-3022A7934564}"/>
-              </a:ext>
-            </a:extLst>
-          </p:cNvPr>
-          <p:cNvSpPr>
-            <a:spLocks noGrp="1"/>
-          </p:cNvSpPr>
-          <p:nvPr>
-            <p:ph type="ctrTitle"/>
-          </p:nvPr>
-        </p:nvSpPr>
-        <p:spPr>
-          <a:xfrm>
-            <a:off x="1413468" y="290725"/>
-            <a:ext cx="9144000" cy="583482"/>
-          </a:xfrm>
-        </p:spPr>
-        <p:txBody>
-          <a:bodyPr>
-            <a:normAutofit fontScale="90000"/>
-          </a:bodyPr>
-          <a:lstStyle/>
-          <a:p>
-            <a:r>
-              <a:rPr lang="en-US" sz="3600" dirty="0"/>
-              <a:t>What is a Big Data Modeling?</a:t>
-            </a:r>
-          </a:p>
-        </p:txBody>
-      </p:sp>
-      <p:sp>
-        <p:nvSpPr>
-          <p:cNvPr id="3" name="Subtitle 2">
-            <a:extLst>
-              <a:ext uri="{FF2B5EF4-FFF2-40B4-BE49-F238E27FC236}">
-                <a16:creationId xmlns:a16="http://schemas.microsoft.com/office/drawing/2014/main" id="{EC353BF7-8743-7C25-95E3-4E6ADA5D6666}"/>
-              </a:ext>
-            </a:extLst>
-          </p:cNvPr>
-          <p:cNvSpPr>
-            <a:spLocks noGrp="1"/>
-          </p:cNvSpPr>
-          <p:nvPr>
-            <p:ph type="subTitle" idx="1"/>
-          </p:nvPr>
-        </p:nvSpPr>
-        <p:spPr>
-          <a:xfrm>
-            <a:off x="1307184" y="1225900"/>
-            <a:ext cx="9144000" cy="4983188"/>
-          </a:xfrm>
-        </p:spPr>
-        <p:txBody>
-          <a:bodyPr>
-            <a:normAutofit fontScale="70000" lnSpcReduction="20000"/>
-          </a:bodyPr>
-          <a:lstStyle/>
-          <a:p>
-            <a:r>
-              <a:rPr lang="en-US" sz="3600" dirty="0">
-                <a:solidFill>
-                  <a:srgbClr val="C00000"/>
-                </a:solidFill>
-              </a:rPr>
-              <a:t>Big data modeling  </a:t>
-            </a:r>
-            <a:r>
-              <a:rPr lang="en-US" sz="3600" dirty="0">
-                <a:solidFill>
-                  <a:schemeClr val="tx1"/>
-                </a:solidFill>
-              </a:rPr>
-              <a:t>is the process of </a:t>
-            </a:r>
-            <a:r>
-              <a:rPr lang="en-US" sz="3600" dirty="0">
-                <a:solidFill>
-                  <a:srgbClr val="00B0F0"/>
-                </a:solidFill>
-              </a:rPr>
-              <a:t>organizing large</a:t>
-            </a:r>
-            <a:r>
-              <a:rPr lang="en-US" sz="3600" dirty="0">
-                <a:solidFill>
-                  <a:schemeClr val="tx1"/>
-                </a:solidFill>
-              </a:rPr>
-              <a:t>, </a:t>
-            </a:r>
-          </a:p>
-          <a:p>
-            <a:r>
-              <a:rPr lang="en-US" sz="3600" dirty="0">
-                <a:solidFill>
-                  <a:srgbClr val="00B0F0"/>
-                </a:solidFill>
-              </a:rPr>
-              <a:t>fast-moving</a:t>
-            </a:r>
-            <a:r>
-              <a:rPr lang="en-US" sz="3600" dirty="0">
-                <a:solidFill>
-                  <a:schemeClr val="tx1"/>
-                </a:solidFill>
-              </a:rPr>
-              <a:t>, and </a:t>
-            </a:r>
-            <a:r>
-              <a:rPr lang="en-US" sz="3600" dirty="0">
-                <a:solidFill>
-                  <a:srgbClr val="00B0F0"/>
-                </a:solidFill>
-              </a:rPr>
-              <a:t>diverse datasets </a:t>
-            </a:r>
-            <a:r>
-              <a:rPr lang="en-US" sz="3600" dirty="0">
-                <a:solidFill>
-                  <a:schemeClr val="tx1"/>
-                </a:solidFill>
-              </a:rPr>
-              <a:t>so they can be </a:t>
-            </a:r>
-            <a:r>
-              <a:rPr lang="en-US" sz="3600" dirty="0">
-                <a:solidFill>
-                  <a:srgbClr val="00B050"/>
-                </a:solidFill>
-              </a:rPr>
-              <a:t>stored</a:t>
-            </a:r>
-            <a:r>
-              <a:rPr lang="en-US" sz="3600" dirty="0">
-                <a:solidFill>
-                  <a:schemeClr val="tx1"/>
-                </a:solidFill>
-              </a:rPr>
-              <a:t>, </a:t>
-            </a:r>
-          </a:p>
-          <a:p>
-            <a:r>
-              <a:rPr lang="en-US" sz="3600" dirty="0">
-                <a:solidFill>
-                  <a:srgbClr val="00B050"/>
-                </a:solidFill>
-              </a:rPr>
-              <a:t>processed</a:t>
-            </a:r>
-            <a:r>
-              <a:rPr lang="en-US" sz="3600" dirty="0">
-                <a:solidFill>
-                  <a:schemeClr val="tx1"/>
-                </a:solidFill>
-              </a:rPr>
-              <a:t>, </a:t>
-            </a:r>
-            <a:r>
-              <a:rPr lang="en-US" sz="3600" dirty="0">
-                <a:solidFill>
-                  <a:srgbClr val="00B050"/>
-                </a:solidFill>
-              </a:rPr>
-              <a:t>analyzed</a:t>
-            </a:r>
-            <a:r>
-              <a:rPr lang="en-US" sz="3600" dirty="0">
-                <a:solidFill>
-                  <a:schemeClr val="tx1"/>
-                </a:solidFill>
-              </a:rPr>
-              <a:t>, and </a:t>
-            </a:r>
-            <a:r>
-              <a:rPr lang="en-US" sz="3600" dirty="0">
-                <a:solidFill>
-                  <a:srgbClr val="00B050"/>
-                </a:solidFill>
-              </a:rPr>
-              <a:t>understood</a:t>
-            </a:r>
-            <a:r>
-              <a:rPr lang="en-US" sz="3600" dirty="0">
-                <a:solidFill>
-                  <a:schemeClr val="tx1"/>
-                </a:solidFill>
-              </a:rPr>
-              <a:t> efficiently.</a:t>
-            </a:r>
-          </a:p>
-          <a:p>
-            <a:endParaRPr lang="en-US" sz="3600" dirty="0"/>
-          </a:p>
-          <a:p>
-            <a:r>
-              <a:rPr lang="en-US" sz="3600" b="1" u="sng" dirty="0"/>
-              <a:t>Key Characteristics of Big Data:</a:t>
-            </a:r>
-            <a:endParaRPr lang="en-US" sz="3600" b="1" u="sng" dirty="0">
-              <a:solidFill>
-                <a:schemeClr val="tx1"/>
-              </a:solidFill>
-            </a:endParaRPr>
-          </a:p>
-          <a:p>
-            <a:r>
-              <a:rPr lang="en-US" sz="3600" dirty="0">
-                <a:solidFill>
-                  <a:srgbClr val="00B0F0"/>
-                </a:solidFill>
-              </a:rPr>
-              <a:t>1. Volume</a:t>
-            </a:r>
-            <a:r>
-              <a:rPr lang="en-US" sz="3600" dirty="0">
-                <a:solidFill>
-                  <a:schemeClr val="tx1"/>
-                </a:solidFill>
-              </a:rPr>
-              <a:t>: Handles massive amounts of data</a:t>
-            </a:r>
-          </a:p>
-          <a:p>
-            <a:r>
-              <a:rPr lang="en-US" sz="3600" dirty="0">
-                <a:solidFill>
-                  <a:srgbClr val="00B0F0"/>
-                </a:solidFill>
-              </a:rPr>
-              <a:t>2. Velocity</a:t>
-            </a:r>
-            <a:r>
-              <a:rPr lang="en-US" sz="3600" dirty="0">
-                <a:solidFill>
-                  <a:schemeClr val="tx1"/>
-                </a:solidFill>
-              </a:rPr>
-              <a:t>: Supports rapidly generated and processed data</a:t>
-            </a:r>
-          </a:p>
-          <a:p>
-            <a:r>
-              <a:rPr lang="en-US" sz="3600" dirty="0">
-                <a:solidFill>
-                  <a:srgbClr val="00B0F0"/>
-                </a:solidFill>
-              </a:rPr>
-              <a:t>3. Variety</a:t>
-            </a:r>
-            <a:r>
-              <a:rPr lang="en-US" sz="3600" dirty="0">
-                <a:solidFill>
-                  <a:schemeClr val="tx1"/>
-                </a:solidFill>
-              </a:rPr>
-              <a:t>: Combines structured, semi-structured, and unstructured data</a:t>
-            </a:r>
-          </a:p>
-          <a:p>
-            <a:r>
-              <a:rPr lang="en-US" sz="3600" dirty="0">
-                <a:solidFill>
-                  <a:srgbClr val="00B0F0"/>
-                </a:solidFill>
-              </a:rPr>
-              <a:t>4. Veracity</a:t>
-            </a:r>
-            <a:r>
-              <a:rPr lang="en-US" sz="3600" dirty="0">
-                <a:solidFill>
-                  <a:schemeClr val="tx1"/>
-                </a:solidFill>
-              </a:rPr>
-              <a:t>: The quality, reliability, and trust of the data</a:t>
-            </a:r>
-          </a:p>
-          <a:p>
-            <a:r>
-              <a:rPr lang="en-US" sz="3600" dirty="0">
-                <a:solidFill>
-                  <a:srgbClr val="00B0F0"/>
-                </a:solidFill>
-              </a:rPr>
-              <a:t>5. Scalability</a:t>
-            </a:r>
-            <a:r>
-              <a:rPr lang="en-US" sz="3600" dirty="0">
-                <a:solidFill>
-                  <a:schemeClr val="tx1"/>
-                </a:solidFill>
-              </a:rPr>
-              <a:t>: Adapts as data and user demand grow</a:t>
-            </a:r>
-          </a:p>
-          <a:p>
-            <a:endParaRPr lang="en-US" sz="3600" dirty="0"/>
-          </a:p>
-          <a:p>
-            <a:pPr marL="800100" lvl="1" indent="-342900" algn="l">
-              <a:buFont typeface="+mj-lt"/>
-              <a:buAutoNum type="arabicPeriod"/>
-            </a:pPr>
-            <a:endParaRPr lang="en-US" sz="1200" dirty="0"/>
-          </a:p>
-        </p:txBody>
-      </p:sp>
-      <p:sp>
-        <p:nvSpPr>
-          <p:cNvPr id="4" name="Slide Number">
-            <a:extLst>
-              <a:ext uri="{FF2B5EF4-FFF2-40B4-BE49-F238E27FC236}">
-                <a16:creationId xmlns:a16="http://schemas.microsoft.com/office/drawing/2014/main" id="{90295111-642A-45CA-B8EA-9089545A24F5}"/>
-              </a:ext>
-            </a:extLst>
-          </p:cNvPr>
-          <p:cNvSpPr>
-            <a:spLocks noGrp="1"/>
-          </p:cNvSpPr>
-          <p:nvPr/>
-        </p:nvSpPr>
-        <p:spPr>
-          <a:xfrm>
-            <a:off x="11334750" y="6457950"/>
-            <a:ext cx="571500" cy="266700"/>
-          </a:xfrm>
-          <a:prstGeom prst="rect">
-            <a:avLst/>
-          </a:prstGeom>
-          <a:noFill/>
-          <a:ln w="0">
-            <a:noFill/>
-          </a:ln>
-        </p:spPr>
-        <p:txBody>
-          <a:bodyPr/>
-          <a:lstStyle/>
-          <a:p>
-            <a:pPr algn="r">
-              <a:defRPr sz="1350">
-                <a:solidFill>
-                  <a:srgbClr val="555555"/>
-                </a:solidFill>
-              </a:defRPr>
-            </a:pPr>
-            <a:fld id="{1D2C215F-622A-4B6A-98C5-30662BEA2626}" type="slidenum">
-              <a:rPr sz="1350">
-                <a:solidFill>
-                  <a:srgbClr val="555555"/>
-                </a:solidFill>
-              </a:rPr>
-              <a:t>4</a:t>
-            </a:fld>
-            <a:endParaRPr sz="1350">
-              <a:solidFill>
-                <a:srgbClr val="555555"/>
-              </a:solidFill>
-            </a:endParaRPr>
-          </a:p>
-        </p:txBody>
-      </p:sp>
-    </p:spTree>
-    <p:extLst>
-      <p:ext uri="{BB962C8B-B14F-4D97-AF65-F5344CB8AC3E}">
-        <p14:creationId xmlns:p14="http://schemas.microsoft.com/office/powerpoint/2010/main" val="614690070"/>
-      </p:ext>
-    </p:extLst>
-  </p:cSld>
-  <p:clrMapOvr>
-    <a:masterClrMapping/>
-  </p:clrMapOvr>
-  <p:timing>
-    <p:tnLst>
-      <p:par>
-        <p:cTn id="1" dur="indefinite" restart="never" nodeType="tmRoot">
-          <p:childTnLst>
-            <p:seq concurrent="1" nextAc="seek">
-              <p:cTn id="2" dur="indefinite" nodeType="mainSeq">
-                <p:childTnLst>
-                  <p:par>
-                    <p:cTn id="3" fill="hold">
-                      <p:stCondLst>
-                        <p:cond delay="indefinite"/>
-                      </p:stCondLst>
-                      <p:childTnLst>
-                        <p:par>
-                          <p:cTn id="4" fill="hold">
-                            <p:stCondLst>
-                              <p:cond delay="0"/>
-                            </p:stCondLst>
-                            <p:childTnLst>
-                              <p:par>
-                                <p:cTn id="5" presetID="1" presetClass="entr" presetSubtype="0" fill="hold" nodeType="clickEffect">
-                                  <p:stCondLst>
-                                    <p:cond delay="0"/>
-                                  </p:stCondLst>
-                                  <p:childTnLst>
-                                    <p:set>
-                                      <p:cBhvr>
-                                        <p:cTn id="6" dur="1" fill="hold">
-                                          <p:stCondLst>
-                                            <p:cond delay="0"/>
-                                          </p:stCondLst>
-                                        </p:cTn>
-                                        <p:tgtEl>
-                                          <p:spTgt spid="3">
-                                            <p:txEl>
-                                              <p:pRg st="0" end="0"/>
-                                            </p:txEl>
-                                          </p:spTgt>
-                                        </p:tgtEl>
-                                        <p:attrNameLst>
-                                          <p:attrName>style.visibility</p:attrName>
-                                        </p:attrNameLst>
-                                      </p:cBhvr>
-                                      <p:to>
-                                        <p:strVal val="visible"/>
-                                      </p:to>
-                                    </p:set>
-                                  </p:childTnLst>
-                                </p:cTn>
-                              </p:par>
-                            </p:childTnLst>
-                          </p:cTn>
-                        </p:par>
-                      </p:childTnLst>
-                    </p:cTn>
-                  </p:par>
-                  <p:par>
-                    <p:cTn id="7" fill="hold">
-                      <p:stCondLst>
-                        <p:cond delay="indefinite"/>
-                      </p:stCondLst>
-                      <p:childTnLst>
-                        <p:par>
-                          <p:cTn id="8" fill="hold">
-                            <p:stCondLst>
-                              <p:cond delay="0"/>
-                            </p:stCondLst>
-                            <p:childTnLst>
-                              <p:par>
-                                <p:cTn id="9" presetID="1" presetClass="entr" presetSubtype="0" fill="hold" nodeType="clickEffect">
-                                  <p:stCondLst>
-                                    <p:cond delay="0"/>
-                                  </p:stCondLst>
-                                  <p:childTnLst>
-                                    <p:set>
-                                      <p:cBhvr>
-                                        <p:cTn id="10" dur="1" fill="hold">
-                                          <p:stCondLst>
-                                            <p:cond delay="0"/>
-                                          </p:stCondLst>
-                                        </p:cTn>
-                                        <p:tgtEl>
-                                          <p:spTgt spid="3">
-                                            <p:txEl>
-                                              <p:pRg st="1" end="1"/>
-                                            </p:txEl>
-                                          </p:spTgt>
-                                        </p:tgtEl>
-                                        <p:attrNameLst>
-                                          <p:attrName>style.visibility</p:attrName>
-                                        </p:attrNameLst>
-                                      </p:cBhvr>
-                                      <p:to>
-                                        <p:strVal val="visible"/>
-                                      </p:to>
-                                    </p:set>
-                                  </p:childTnLst>
-                                </p:cTn>
-                              </p:par>
-                            </p:childTnLst>
-                          </p:cTn>
-                        </p:par>
-                      </p:childTnLst>
-                    </p:cTn>
-                  </p:par>
-                  <p:par>
-                    <p:cTn id="11" fill="hold">
-                      <p:stCondLst>
-                        <p:cond delay="indefinite"/>
-                      </p:stCondLst>
-                      <p:childTnLst>
-                        <p:par>
-                          <p:cTn id="12" fill="hold">
-                            <p:stCondLst>
-                              <p:cond delay="0"/>
-                            </p:stCondLst>
-                            <p:childTnLst>
-                              <p:par>
-                                <p:cTn id="13" presetID="1" presetClass="entr" presetSubtype="0" fill="hold" nodeType="clickEffect">
-                                  <p:stCondLst>
-                                    <p:cond delay="0"/>
-                                  </p:stCondLst>
-                                  <p:childTnLst>
-                                    <p:set>
-                                      <p:cBhvr>
-                                        <p:cTn id="14" dur="1" fill="hold">
-                                          <p:stCondLst>
-                                            <p:cond delay="0"/>
-                                          </p:stCondLst>
-                                        </p:cTn>
-                                        <p:tgtEl>
-                                          <p:spTgt spid="3">
-                                            <p:txEl>
-                                              <p:pRg st="2" end="2"/>
-                                            </p:txEl>
-                                          </p:spTgt>
-                                        </p:tgtEl>
-                                        <p:attrNameLst>
-                                          <p:attrName>style.visibility</p:attrName>
-                                        </p:attrNameLst>
-                                      </p:cBhvr>
-                                      <p:to>
-                                        <p:strVal val="visible"/>
-                                      </p:to>
-                                    </p:set>
-                                  </p:childTnLst>
-                                </p:cTn>
-                              </p:par>
-                            </p:childTnLst>
-                          </p:cTn>
-                        </p:par>
-                      </p:childTnLst>
-                    </p:cTn>
-                  </p:par>
-                  <p:par>
-                    <p:cTn id="15" fill="hold">
-                      <p:stCondLst>
-                        <p:cond delay="indefinite"/>
-                      </p:stCondLst>
-                      <p:childTnLst>
-                        <p:par>
-                          <p:cTn id="16" fill="hold">
-                            <p:stCondLst>
-                              <p:cond delay="0"/>
-                            </p:stCondLst>
-                            <p:childTnLst>
-                              <p:par>
-                                <p:cTn id="17" presetID="1" presetClass="entr" presetSubtype="0" fill="hold" nodeType="clickEffect">
-                                  <p:stCondLst>
-                                    <p:cond delay="0"/>
-                                  </p:stCondLst>
-                                  <p:childTnLst>
-                                    <p:set>
-                                      <p:cBhvr>
-                                        <p:cTn id="18" dur="1" fill="hold">
-                                          <p:stCondLst>
-                                            <p:cond delay="0"/>
-                                          </p:stCondLst>
-                                        </p:cTn>
-                                        <p:tgtEl>
-                                          <p:spTgt spid="3">
-                                            <p:txEl>
-                                              <p:pRg st="4" end="4"/>
-                                            </p:txEl>
-                                          </p:spTgt>
-                                        </p:tgtEl>
-                                        <p:attrNameLst>
-                                          <p:attrName>style.visibility</p:attrName>
-                                        </p:attrNameLst>
-                                      </p:cBhvr>
-                                      <p:to>
-                                        <p:strVal val="visible"/>
-                                      </p:to>
-                                    </p:set>
-                                  </p:childTnLst>
-                                </p:cTn>
-                              </p:par>
-                            </p:childTnLst>
-                          </p:cTn>
-                        </p:par>
-                      </p:childTnLst>
-                    </p:cTn>
-                  </p:par>
-                  <p:par>
-                    <p:cTn id="19" fill="hold">
-                      <p:stCondLst>
-                        <p:cond delay="indefinite"/>
-                      </p:stCondLst>
-                      <p:childTnLst>
-                        <p:par>
-                          <p:cTn id="20" fill="hold">
-                            <p:stCondLst>
-                              <p:cond delay="0"/>
-                            </p:stCondLst>
-                            <p:childTnLst>
-                              <p:par>
-                                <p:cTn id="21" presetID="1" presetClass="entr" presetSubtype="0" fill="hold" nodeType="clickEffect">
-                                  <p:stCondLst>
-                                    <p:cond delay="0"/>
-                                  </p:stCondLst>
-                                  <p:childTnLst>
-                                    <p:set>
-                                      <p:cBhvr>
-                                        <p:cTn id="22" dur="1" fill="hold">
-                                          <p:stCondLst>
-                                            <p:cond delay="0"/>
-                                          </p:stCondLst>
-                                        </p:cTn>
-                                        <p:tgtEl>
-                                          <p:spTgt spid="3">
-                                            <p:txEl>
-                                              <p:pRg st="5" end="5"/>
-                                            </p:txEl>
-                                          </p:spTgt>
-                                        </p:tgtEl>
-                                        <p:attrNameLst>
-                                          <p:attrName>style.visibility</p:attrName>
-                                        </p:attrNameLst>
-                                      </p:cBhvr>
-                                      <p:to>
-                                        <p:strVal val="visible"/>
-                                      </p:to>
-                                    </p:set>
-                                  </p:childTnLst>
-                                </p:cTn>
-                              </p:par>
-                            </p:childTnLst>
-                          </p:cTn>
-                        </p:par>
-                      </p:childTnLst>
-                    </p:cTn>
-                  </p:par>
-                  <p:par>
-                    <p:cTn id="23" fill="hold">
-                      <p:stCondLst>
-                        <p:cond delay="indefinite"/>
-                      </p:stCondLst>
-                      <p:childTnLst>
-                        <p:par>
-                          <p:cTn id="24" fill="hold">
-                            <p:stCondLst>
-                              <p:cond delay="0"/>
-                            </p:stCondLst>
-                            <p:childTnLst>
-                              <p:par>
-                                <p:cTn id="25" presetID="1" presetClass="entr" presetSubtype="0" fill="hold" nodeType="clickEffect">
-                                  <p:stCondLst>
-                                    <p:cond delay="0"/>
-                                  </p:stCondLst>
-                                  <p:childTnLst>
-                                    <p:set>
-                                      <p:cBhvr>
-                                        <p:cTn id="26" dur="1" fill="hold">
-                                          <p:stCondLst>
-                                            <p:cond delay="0"/>
-                                          </p:stCondLst>
-                                        </p:cTn>
-                                        <p:tgtEl>
-                                          <p:spTgt spid="3">
-                                            <p:txEl>
-                                              <p:pRg st="6" end="6"/>
-                                            </p:txEl>
-                                          </p:spTgt>
-                                        </p:tgtEl>
-                                        <p:attrNameLst>
-                                          <p:attrName>style.visibility</p:attrName>
-                                        </p:attrNameLst>
-                                      </p:cBhvr>
-                                      <p:to>
-                                        <p:strVal val="visible"/>
-                                      </p:to>
-                                    </p:set>
-                                  </p:childTnLst>
-                                </p:cTn>
-                              </p:par>
-                            </p:childTnLst>
-                          </p:cTn>
-                        </p:par>
-                      </p:childTnLst>
-                    </p:cTn>
-                  </p:par>
-                  <p:par>
-                    <p:cTn id="27" fill="hold">
-                      <p:stCondLst>
-                        <p:cond delay="indefinite"/>
-                      </p:stCondLst>
-                      <p:childTnLst>
-                        <p:par>
-                          <p:cTn id="28" fill="hold">
-                            <p:stCondLst>
-                              <p:cond delay="0"/>
-                            </p:stCondLst>
-                            <p:childTnLst>
-                              <p:par>
-                                <p:cTn id="29" presetID="1" presetClass="entr" presetSubtype="0" fill="hold" nodeType="clickEffect">
-                                  <p:stCondLst>
-                                    <p:cond delay="0"/>
-                                  </p:stCondLst>
-                                  <p:childTnLst>
-                                    <p:set>
-                                      <p:cBhvr>
-                                        <p:cTn id="30" dur="1" fill="hold">
-                                          <p:stCondLst>
-                                            <p:cond delay="0"/>
-                                          </p:stCondLst>
-                                        </p:cTn>
-                                        <p:tgtEl>
-                                          <p:spTgt spid="3">
-                                            <p:txEl>
-                                              <p:pRg st="7" end="7"/>
-                                            </p:txEl>
-                                          </p:spTgt>
-                                        </p:tgtEl>
-                                        <p:attrNameLst>
-                                          <p:attrName>style.visibility</p:attrName>
-                                        </p:attrNameLst>
-                                      </p:cBhvr>
-                                      <p:to>
-                                        <p:strVal val="visible"/>
-                                      </p:to>
-                                    </p:set>
-                                  </p:childTnLst>
-                                </p:cTn>
-                              </p:par>
-                            </p:childTnLst>
-                          </p:cTn>
-                        </p:par>
-                      </p:childTnLst>
-                    </p:cTn>
-                  </p:par>
-                  <p:par>
-                    <p:cTn id="31" fill="hold">
-                      <p:stCondLst>
-                        <p:cond delay="indefinite"/>
-                      </p:stCondLst>
-                      <p:childTnLst>
-                        <p:par>
-                          <p:cTn id="32" fill="hold">
-                            <p:stCondLst>
-                              <p:cond delay="0"/>
-                            </p:stCondLst>
-                            <p:childTnLst>
-                              <p:par>
-                                <p:cTn id="33" presetID="1" presetClass="entr" presetSubtype="0" fill="hold" nodeType="clickEffect">
-                                  <p:stCondLst>
-                                    <p:cond delay="0"/>
-                                  </p:stCondLst>
-                                  <p:childTnLst>
-                                    <p:set>
-                                      <p:cBhvr>
-                                        <p:cTn id="34" dur="1" fill="hold">
-                                          <p:stCondLst>
-                                            <p:cond delay="0"/>
-                                          </p:stCondLst>
-                                        </p:cTn>
-                                        <p:tgtEl>
-                                          <p:spTgt spid="3">
-                                            <p:txEl>
-                                              <p:pRg st="8" end="8"/>
-                                            </p:txEl>
-                                          </p:spTgt>
-                                        </p:tgtEl>
-                                        <p:attrNameLst>
-                                          <p:attrName>style.visibility</p:attrName>
-                                        </p:attrNameLst>
-                                      </p:cBhvr>
-                                      <p:to>
-                                        <p:strVal val="visible"/>
-                                      </p:to>
-                                    </p:set>
-                                  </p:childTnLst>
-                                </p:cTn>
-                              </p:par>
-                            </p:childTnLst>
-                          </p:cTn>
-                        </p:par>
-                      </p:childTnLst>
-                    </p:cTn>
-                  </p:par>
-                  <p:par>
-                    <p:cTn id="35" fill="hold">
-                      <p:stCondLst>
-                        <p:cond delay="indefinite"/>
-                      </p:stCondLst>
-                      <p:childTnLst>
-                        <p:par>
-                          <p:cTn id="36" fill="hold">
-                            <p:stCondLst>
-                              <p:cond delay="0"/>
-                            </p:stCondLst>
-                            <p:childTnLst>
-                              <p:par>
-                                <p:cTn id="37" presetID="1" presetClass="entr" presetSubtype="0" fill="hold" nodeType="clickEffect">
-                                  <p:stCondLst>
-                                    <p:cond delay="0"/>
-                                  </p:stCondLst>
-                                  <p:childTnLst>
-                                    <p:set>
-                                      <p:cBhvr>
-                                        <p:cTn id="38" dur="1" fill="hold">
-                                          <p:stCondLst>
-                                            <p:cond delay="0"/>
-                                          </p:stCondLst>
-                                        </p:cTn>
-                                        <p:tgtEl>
-                                          <p:spTgt spid="3">
-                                            <p:txEl>
-                                              <p:pRg st="9" end="9"/>
-                                            </p:txEl>
-                                          </p:spTgt>
-                                        </p:tgtEl>
-                                        <p:attrNameLst>
-                                          <p:attrName>style.visibility</p:attrName>
-                                        </p:attrNameLst>
-                                      </p:cBhvr>
-                                      <p:to>
-                                        <p:strVal val="visible"/>
-                                      </p:to>
-                                    </p:set>
-                                  </p:childTnLst>
-                                </p:cTn>
-                              </p:par>
-                            </p:childTnLst>
-                          </p:cTn>
-                        </p:par>
-                      </p:childTnLst>
-                    </p:cTn>
-                  </p:par>
-                </p:childTnLst>
-              </p:cTn>
-              <p:prevCondLst>
-                <p:cond evt="onPrev" delay="0">
-                  <p:tgtEl>
-                    <p:sldTgt/>
-                  </p:tgtEl>
-                </p:cond>
-              </p:prevCondLst>
-              <p:nextCondLst>
-                <p:cond evt="onNext" delay="0">
-                  <p:tgtEl>
-                    <p:sldTgt/>
-                  </p:tgtEl>
-                </p:cond>
-              </p:nextCondLst>
-            </p:seq>
-          </p:childTnLst>
-        </p:cTn>
-      </p:par>
-    </p:tnLst>
-  </p:timing>
-</p:sld>
-</file>
-
-<file path=ppt/slides/slide40.xml><?xml version="1.0" encoding="utf-8"?>
+<file path=ppt/slides/slide41.xml><?xml version="1.0" encoding="utf-8"?>
 <p:sld xmlns:a="http://schemas.openxmlformats.org/drawingml/2006/main" xmlns:r="http://schemas.openxmlformats.org/officeDocument/2006/relationships" xmlns:p="http://schemas.openxmlformats.org/presentationml/2006/main">
   <p:cSld>
     <p:spTree>
@@ -28283,15 +28536,7 @@
           <a:p>
             <a:r>
               <a:rPr lang="en-US" sz="3200" dirty="0"/>
-              <a:t>PySpark </a:t>
-            </a:r>
-            <a:r>
-              <a:rPr lang="en-US" sz="3200" dirty="0" err="1"/>
-              <a:t>DataFrame</a:t>
-            </a:r>
-            <a:r>
-              <a:rPr lang="en-US" sz="3200" dirty="0"/>
-              <a:t> Example-2 - 05</a:t>
+              <a:t>PySpark DataFrame Example-2 - 05</a:t>
             </a:r>
           </a:p>
         </p:txBody>
@@ -28708,7 +28953,7 @@
                   <a:srgbClr val="555555"/>
                 </a:solidFill>
               </a:rPr>
-              <a:t>40</a:t>
+              <a:t>41</a:t>
             </a:fld>
             <a:endParaRPr sz="1350">
               <a:solidFill>
@@ -29349,7 +29594,7 @@
 </p:sld>
 </file>
 
-<file path=ppt/slides/slide41.xml><?xml version="1.0" encoding="utf-8"?>
+<file path=ppt/slides/slide42.xml><?xml version="1.0" encoding="utf-8"?>
 <p:sld xmlns:a="http://schemas.openxmlformats.org/drawingml/2006/main" xmlns:r="http://schemas.openxmlformats.org/officeDocument/2006/relationships" xmlns:p="http://schemas.openxmlformats.org/presentationml/2006/main">
   <p:cSld>
     <p:spTree>
@@ -29402,15 +29647,7 @@
           <a:p>
             <a:r>
               <a:rPr lang="en-US" sz="3200" dirty="0"/>
-              <a:t>PySpark </a:t>
-            </a:r>
-            <a:r>
-              <a:rPr lang="en-US" sz="3200" dirty="0" err="1"/>
-              <a:t>DataFrame</a:t>
-            </a:r>
-            <a:r>
-              <a:rPr lang="en-US" sz="3200" dirty="0"/>
-              <a:t> Example-2 - 06</a:t>
+              <a:t>PySpark DataFrame Example-2 - 06</a:t>
             </a:r>
           </a:p>
         </p:txBody>
@@ -29929,7 +30166,7 @@
                   <a:srgbClr val="555555"/>
                 </a:solidFill>
               </a:rPr>
-              <a:t>41</a:t>
+              <a:t>42</a:t>
             </a:fld>
             <a:endParaRPr sz="1350">
               <a:solidFill>
@@ -30472,7 +30709,7 @@
 </p:sld>
 </file>
 
-<file path=ppt/slides/slide42.xml><?xml version="1.0" encoding="utf-8"?>
+<file path=ppt/slides/slide43.xml><?xml version="1.0" encoding="utf-8"?>
 <p:sld xmlns:a="http://schemas.openxmlformats.org/drawingml/2006/main" xmlns:r="http://schemas.openxmlformats.org/officeDocument/2006/relationships" xmlns:p="http://schemas.openxmlformats.org/presentationml/2006/main">
   <p:cSld>
     <p:spTree>
@@ -30525,15 +30762,7 @@
           <a:p>
             <a:r>
               <a:rPr lang="en-US" sz="3200" dirty="0"/>
-              <a:t>PySpark </a:t>
-            </a:r>
-            <a:r>
-              <a:rPr lang="en-US" sz="3200" dirty="0" err="1"/>
-              <a:t>DataFrame</a:t>
-            </a:r>
-            <a:r>
-              <a:rPr lang="en-US" sz="3200" dirty="0"/>
-              <a:t> Example-2 - 07</a:t>
+              <a:t>PySpark DataFrame Example-2 - 07</a:t>
             </a:r>
           </a:p>
         </p:txBody>
@@ -30730,7 +30959,7 @@
                   <a:srgbClr val="555555"/>
                 </a:solidFill>
               </a:rPr>
-              <a:t>42</a:t>
+              <a:t>43</a:t>
             </a:fld>
             <a:endParaRPr sz="1350">
               <a:solidFill>
@@ -31175,7 +31404,7 @@
 </p:sld>
 </file>
 
-<file path=ppt/slides/slide43.xml><?xml version="1.0" encoding="utf-8"?>
+<file path=ppt/slides/slide44.xml><?xml version="1.0" encoding="utf-8"?>
 <p:sld xmlns:a="http://schemas.openxmlformats.org/drawingml/2006/main" xmlns:r="http://schemas.openxmlformats.org/officeDocument/2006/relationships" xmlns:p="http://schemas.openxmlformats.org/presentationml/2006/main">
   <p:cSld>
     <p:spTree>
@@ -31349,7 +31578,7 @@
                   <a:srgbClr val="555555"/>
                 </a:solidFill>
               </a:rPr>
-              <a:t>43</a:t>
+              <a:t>44</a:t>
             </a:fld>
             <a:endParaRPr sz="1350">
               <a:solidFill>
@@ -31516,7 +31745,7 @@
 </p:sld>
 </file>
 
-<file path=ppt/slides/slide44.xml><?xml version="1.0" encoding="utf-8"?>
+<file path=ppt/slides/slide45.xml><?xml version="1.0" encoding="utf-8"?>
 <p:sld xmlns:a="http://schemas.openxmlformats.org/drawingml/2006/main" xmlns:r="http://schemas.openxmlformats.org/officeDocument/2006/relationships" xmlns:p="http://schemas.openxmlformats.org/presentationml/2006/main">
   <p:cSld>
     <p:spTree>
@@ -31722,7 +31951,7 @@
                   <a:srgbClr val="555555"/>
                 </a:solidFill>
               </a:rPr>
-              <a:t>44</a:t>
+              <a:t>45</a:t>
             </a:fld>
             <a:endParaRPr sz="1350">
               <a:solidFill>
@@ -31824,7 +32053,7 @@
 </p:sld>
 </file>
 
-<file path=ppt/slides/slide45.xml><?xml version="1.0" encoding="utf-8"?>
+<file path=ppt/slides/slide46.xml><?xml version="1.0" encoding="utf-8"?>
 <p:sld xmlns:a="http://schemas.openxmlformats.org/drawingml/2006/main" xmlns:r="http://schemas.openxmlformats.org/officeDocument/2006/relationships" xmlns:p="http://schemas.openxmlformats.org/presentationml/2006/main">
   <p:cSld>
     <p:spTree>
@@ -32024,7 +32253,7 @@
                   <a:srgbClr val="555555"/>
                 </a:solidFill>
               </a:rPr>
-              <a:t>45</a:t>
+              <a:t>46</a:t>
             </a:fld>
             <a:endParaRPr sz="1350">
               <a:solidFill>
@@ -32371,7 +32600,7 @@
 </p:sld>
 </file>
 
-<file path=ppt/slides/slide46.xml><?xml version="1.0" encoding="utf-8"?>
+<file path=ppt/slides/slide47.xml><?xml version="1.0" encoding="utf-8"?>
 <p:sld xmlns:a="http://schemas.openxmlformats.org/drawingml/2006/main" xmlns:r="http://schemas.openxmlformats.org/officeDocument/2006/relationships" xmlns:p="http://schemas.openxmlformats.org/presentationml/2006/main">
   <p:cSld>
     <p:spTree>
@@ -32495,7 +32724,7 @@
                   <a:srgbClr val="555555"/>
                 </a:solidFill>
               </a:rPr>
-              <a:t>46</a:t>
+              <a:t>47</a:t>
             </a:fld>
             <a:endParaRPr sz="1350">
               <a:solidFill>

--- a/course_information/COURSE_OUTLINE_10_WEEKS.pptx
+++ b/course_information/COURSE_OUTLINE_10_WEEKS.pptx
@@ -243,7 +243,7 @@
           <a:p>
             <a:fld id="{3D165E93-E323-764B-9CF0-D55E433161EB}" type="datetimeFigureOut">
               <a:rPr lang="en-US" smtClean="0"/>
-              <a:t>9/20/26</a:t>
+              <a:t>9/21/26</a:t>
             </a:fld>
             <a:endParaRPr lang="en-US"/>
           </a:p>
@@ -7049,7 +7049,7 @@
         <p:spPr>
           <a:xfrm>
             <a:off x="355600" y="793820"/>
-            <a:ext cx="9144000" cy="3407477"/>
+            <a:ext cx="9144000" cy="2827921"/>
           </a:xfrm>
         </p:spPr>
         <p:txBody>
@@ -7106,8 +7106,8 @@
         </p:nvSpPr>
         <p:spPr>
           <a:xfrm>
-            <a:off x="355600" y="4680581"/>
-            <a:ext cx="9144000" cy="959386"/>
+            <a:off x="355600" y="4249271"/>
+            <a:ext cx="9144000" cy="1390696"/>
           </a:xfrm>
         </p:spPr>
         <p:txBody>
@@ -7118,7 +7118,10 @@
           <a:p>
             <a:pPr algn="ctr"/>
             <a:r>
-              <a:rPr lang="en-US" dirty="0">
+              <a:rPr lang="en-US" sz="3200" dirty="0">
+                <a:solidFill>
+                  <a:srgbClr val="002060"/>
+                </a:solidFill>
                 <a:latin typeface="Consolas" panose="020B0609020204030204" pitchFamily="49" charset="0"/>
                 <a:cs typeface="Consolas" panose="020B0609020204030204" pitchFamily="49" charset="0"/>
               </a:rPr>
@@ -7128,7 +7131,10 @@
           <a:p>
             <a:pPr algn="ctr"/>
             <a:r>
-              <a:rPr lang="en-US" sz="1400" dirty="0">
+              <a:rPr lang="en-US" sz="1800" dirty="0">
+                <a:solidFill>
+                  <a:srgbClr val="002060"/>
+                </a:solidFill>
                 <a:latin typeface="Consolas" panose="020B0609020204030204" pitchFamily="49" charset="0"/>
                 <a:cs typeface="Consolas" panose="020B0609020204030204" pitchFamily="49" charset="0"/>
               </a:rPr>
@@ -7559,8 +7565,8 @@
         </p:nvSpPr>
         <p:spPr>
           <a:xfrm>
-            <a:off x="9004052" y="3175686"/>
-            <a:ext cx="1404730" cy="916080"/>
+            <a:off x="9004052" y="3175685"/>
+            <a:ext cx="1663948" cy="1033669"/>
           </a:xfrm>
           <a:prstGeom prst="foldedCorner">
             <a:avLst/>
@@ -7616,19 +7622,18 @@
           <p:cNvCxnSpPr>
             <a:cxnSpLocks/>
             <a:stCxn id="4" idx="3"/>
-            <a:endCxn id="5" idx="1"/>
           </p:cNvCxnSpPr>
           <p:nvPr/>
         </p:nvCxnSpPr>
         <p:spPr>
           <a:xfrm>
             <a:off x="3111000" y="3832171"/>
-            <a:ext cx="889121" cy="397130"/>
+            <a:ext cx="889121" cy="0"/>
           </a:xfrm>
           <a:prstGeom prst="straightConnector1">
             <a:avLst/>
           </a:prstGeom>
-          <a:ln w="22225">
+          <a:ln w="50800">
             <a:solidFill>
               <a:schemeClr val="tx1"/>
             </a:solidFill>
@@ -7661,23 +7666,22 @@
           </p:cNvPr>
           <p:cNvCxnSpPr>
             <a:cxnSpLocks/>
-            <a:stCxn id="5" idx="3"/>
             <a:endCxn id="6" idx="1"/>
           </p:cNvCxnSpPr>
           <p:nvPr/>
         </p:nvCxnSpPr>
         <p:spPr>
           <a:xfrm flipV="1">
-            <a:off x="8192775" y="3633726"/>
-            <a:ext cx="811277" cy="595575"/>
+            <a:off x="8191881" y="3692520"/>
+            <a:ext cx="812171" cy="54727"/>
           </a:xfrm>
           <a:prstGeom prst="straightConnector1">
             <a:avLst/>
           </a:prstGeom>
-          <a:ln w="31750">
+          <a:ln w="47625">
             <a:solidFill>
               <a:schemeClr val="tx1">
-                <a:alpha val="94000"/>
+                <a:alpha val="70000"/>
               </a:schemeClr>
             </a:solidFill>
             <a:tailEnd type="triangle" w="lg" len="lg"/>
@@ -11334,7 +11338,7 @@
                   <a:srgbClr val="0070C0"/>
                 </a:solidFill>
               </a:rPr>
-              <a:t>Big Data Modeling &amp; Analytics?</a:t>
+              <a:t>Big Data Modeling &amp; Analytics:</a:t>
             </a:r>
           </a:p>
         </p:txBody>
@@ -11358,7 +11362,7 @@
         <p:spPr>
           <a:xfrm>
             <a:off x="1307184" y="1225900"/>
-            <a:ext cx="9144000" cy="4983188"/>
+            <a:ext cx="9144000" cy="4628053"/>
           </a:xfrm>
         </p:spPr>
         <p:txBody>
@@ -11467,15 +11471,7 @@
                   <a:srgbClr val="00B050"/>
                 </a:solidFill>
               </a:rPr>
-              <a:t>3. Amazon Athena &amp; Google’s </a:t>
-            </a:r>
-            <a:r>
-              <a:rPr lang="en-US" sz="3200" b="1" dirty="0" err="1">
-                <a:solidFill>
-                  <a:srgbClr val="00B050"/>
-                </a:solidFill>
-              </a:rPr>
-              <a:t>BigQuery</a:t>
+              <a:t>3. Amazon Athena &amp; Google’s BigQuery</a:t>
             </a:r>
             <a:endParaRPr lang="en-US" sz="3200" b="1" dirty="0">
               <a:solidFill>
@@ -12050,7 +12046,7 @@
                   <a:schemeClr val="tx1"/>
                 </a:solidFill>
               </a:rPr>
-              <a:t>Assume your input is comprised of 80,000,000,000 records, which might be partitioned into 40,000 chunks</a:t>
+              <a:t>Assume your input is comprised of 80,000,000,000 records, which might be partitioned into 40,000 chunks (partitions)</a:t>
             </a:r>
           </a:p>
           <a:p>
@@ -12120,7 +12116,18 @@
                   <a:schemeClr val="tx1"/>
                 </a:solidFill>
               </a:rPr>
-              <a:t>A mapper function, map(K, V) is executed on all partitions in parallel (as much as possible – depends on resources available). </a:t>
+              <a:t>A mapper function, map(K, V) is executed on all partitions in parallel </a:t>
+            </a:r>
+          </a:p>
+          <a:p>
+            <a:pPr algn="l"/>
+            <a:r>
+              <a:rPr lang="en-US" dirty="0">
+                <a:solidFill>
+                  <a:schemeClr val="tx1"/>
+                </a:solidFill>
+              </a:rPr>
+              <a:t>      (as much as possible – depends on resources available). </a:t>
             </a:r>
           </a:p>
           <a:p>
@@ -12674,6 +12681,55 @@
                                           <p:spTgt spid="3">
                                             <p:txEl>
                                               <p:pRg st="8" end="8"/>
+                                            </p:txEl>
+                                          </p:spTgt>
+                                        </p:tgtEl>
+                                        <p:attrNameLst>
+                                          <p:attrName>style.visibility</p:attrName>
+                                        </p:attrNameLst>
+                                      </p:cBhvr>
+                                      <p:to>
+                                        <p:strVal val="visible"/>
+                                      </p:to>
+                                    </p:set>
+                                  </p:childTnLst>
+                                </p:cTn>
+                              </p:par>
+                            </p:childTnLst>
+                          </p:cTn>
+                        </p:par>
+                      </p:childTnLst>
+                    </p:cTn>
+                  </p:par>
+                  <p:par>
+                    <p:cTn id="39" fill="hold">
+                      <p:stCondLst>
+                        <p:cond delay="indefinite"/>
+                      </p:stCondLst>
+                      <p:childTnLst>
+                        <p:par>
+                          <p:cTn id="40" fill="hold">
+                            <p:stCondLst>
+                              <p:cond delay="0"/>
+                            </p:stCondLst>
+                            <p:childTnLst>
+                              <p:par>
+                                <p:cTn id="41" presetID="1" presetClass="entr" presetSubtype="0" fill="hold" nodeType="clickEffect">
+                                  <p:stCondLst>
+                                    <p:cond delay="0"/>
+                                  </p:stCondLst>
+                                  <p:childTnLst>
+                                    <p:set>
+                                      <p:cBhvr>
+                                        <p:cTn id="42" dur="1" fill="hold">
+                                          <p:stCondLst>
+                                            <p:cond delay="0"/>
+                                          </p:stCondLst>
+                                        </p:cTn>
+                                        <p:tgtEl>
+                                          <p:spTgt spid="3">
+                                            <p:txEl>
+                                              <p:pRg st="9" end="9"/>
                                             </p:txEl>
                                           </p:spTgt>
                                         </p:tgtEl>
@@ -14566,10 +14622,18 @@
               <a:t>Apache Spark: </a:t>
             </a:r>
             <a:r>
-              <a:rPr lang="en-US" sz="2700" b="1" dirty="0"/>
+              <a:rPr lang="en-US" sz="2700" b="1" dirty="0">
+                <a:solidFill>
+                  <a:srgbClr val="00B050"/>
+                </a:solidFill>
+              </a:rPr>
               <a:t>engine for large-scale data analytics</a:t>
             </a:r>
-            <a:endParaRPr lang="en-US" b="1" dirty="0"/>
+            <a:endParaRPr lang="en-US" b="1" dirty="0">
+              <a:solidFill>
+                <a:srgbClr val="00B050"/>
+              </a:solidFill>
+            </a:endParaRPr>
           </a:p>
         </p:txBody>
       </p:sp>
@@ -14592,7 +14656,7 @@
         <p:spPr>
           <a:xfrm>
             <a:off x="1524000" y="1729946"/>
-            <a:ext cx="9144000" cy="4243471"/>
+            <a:ext cx="8866094" cy="4243471"/>
           </a:xfrm>
         </p:spPr>
         <p:txBody>
@@ -17885,7 +17949,23 @@
                   <a:schemeClr val="tx1"/>
                 </a:solidFill>
               </a:rPr>
-              <a:t>software cannot capture, store, or analyze them effectively</a:t>
+              <a:t>software </a:t>
+            </a:r>
+            <a:r>
+              <a:rPr lang="en-US" sz="3200" b="1" dirty="0">
+                <a:solidFill>
+                  <a:srgbClr val="FF0000"/>
+                </a:solidFill>
+              </a:rPr>
+              <a:t>cannot</a:t>
+            </a:r>
+            <a:r>
+              <a:rPr lang="en-US" sz="3200" dirty="0">
+                <a:solidFill>
+                  <a:schemeClr val="tx1"/>
+                </a:solidFill>
+              </a:rPr>
+              <a:t> capture, store, or analyze them effectively</a:t>
             </a:r>
             <a:r>
               <a:rPr lang="en-US" sz="3200" b="1" dirty="0">
@@ -18004,7 +18084,7 @@
               <a:buChar char="•"/>
             </a:pPr>
             <a:r>
-              <a:rPr lang="en-US" sz="3200" dirty="0">
+              <a:rPr lang="en-US" sz="3200" u="sng" dirty="0">
                 <a:solidFill>
                   <a:schemeClr val="tx1"/>
                 </a:solidFill>
@@ -18021,7 +18101,7 @@
               <a:buChar char="•"/>
             </a:pPr>
             <a:r>
-              <a:rPr lang="en-US" sz="3200" dirty="0">
+              <a:rPr lang="en-US" sz="3200" u="sng" dirty="0">
                 <a:solidFill>
                   <a:schemeClr val="tx1"/>
                 </a:solidFill>
@@ -18038,7 +18118,7 @@
               <a:buChar char="•"/>
             </a:pPr>
             <a:r>
-              <a:rPr lang="en-US" sz="3200" dirty="0">
+              <a:rPr lang="en-US" sz="3200" u="sng" dirty="0">
                 <a:solidFill>
                   <a:schemeClr val="tx1"/>
                 </a:solidFill>
@@ -33373,7 +33453,11 @@
           <a:lstStyle/>
           <a:p>
             <a:r>
-              <a:rPr lang="en-US" sz="3600" dirty="0"/>
+              <a:rPr lang="en-US" sz="3600" dirty="0">
+                <a:solidFill>
+                  <a:srgbClr val="0070C0"/>
+                </a:solidFill>
+              </a:rPr>
               <a:t>What is a Big Data Modeling &amp; Analytics?</a:t>
             </a:r>
           </a:p>
@@ -34197,7 +34281,19 @@
             </a:r>
             <a:r>
               <a:rPr lang="en-US" sz="3600" dirty="0"/>
-              <a:t> of Big Data Modeling &amp; Analytics?</a:t>
+              <a:t>  of  </a:t>
+            </a:r>
+            <a:r>
+              <a:rPr lang="en-US" sz="3600" dirty="0">
+                <a:solidFill>
+                  <a:srgbClr val="0070C0"/>
+                </a:solidFill>
+              </a:rPr>
+              <a:t>Big Data Modeling &amp; Analytics</a:t>
+            </a:r>
+            <a:r>
+              <a:rPr lang="en-US" sz="3600" dirty="0"/>
+              <a:t>?</a:t>
             </a:r>
           </a:p>
         </p:txBody>
@@ -34226,7 +34322,7 @@
         </p:spPr>
         <p:txBody>
           <a:bodyPr>
-            <a:normAutofit fontScale="92500" lnSpcReduction="10000"/>
+            <a:normAutofit fontScale="85000" lnSpcReduction="20000"/>
           </a:bodyPr>
           <a:lstStyle/>
           <a:p>
@@ -34240,7 +34336,23 @@
                   <a:schemeClr val="tx1"/>
                 </a:solidFill>
               </a:rPr>
-              <a:t>Faster, evidence-based decisions</a:t>
+              <a:t>Faster, evidence-based decisions (</a:t>
+            </a:r>
+            <a:r>
+              <a:rPr lang="en-US" sz="3600" dirty="0">
+                <a:solidFill>
+                  <a:srgbClr val="00B0F0"/>
+                </a:solidFill>
+              </a:rPr>
+              <a:t>like DNA analysis</a:t>
+            </a:r>
+            <a:r>
+              <a:rPr lang="en-US" sz="3600" dirty="0">
+                <a:solidFill>
+                  <a:schemeClr val="tx1"/>
+                </a:solidFill>
+              </a:rPr>
+              <a:t>)</a:t>
             </a:r>
           </a:p>
           <a:p>
@@ -34254,7 +34366,23 @@
                   <a:schemeClr val="tx1"/>
                 </a:solidFill>
               </a:rPr>
-              <a:t>Improved customer experiences</a:t>
+              <a:t>Improved customer experiences (</a:t>
+            </a:r>
+            <a:r>
+              <a:rPr lang="en-US" sz="3600" dirty="0">
+                <a:solidFill>
+                  <a:srgbClr val="00B0F0"/>
+                </a:solidFill>
+              </a:rPr>
+              <a:t>like Amazon</a:t>
+            </a:r>
+            <a:r>
+              <a:rPr lang="en-US" sz="3600" dirty="0">
+                <a:solidFill>
+                  <a:schemeClr val="tx1"/>
+                </a:solidFill>
+              </a:rPr>
+              <a:t>)</a:t>
             </a:r>
           </a:p>
           <a:p>
@@ -34268,7 +34396,23 @@
                   <a:schemeClr val="tx1"/>
                 </a:solidFill>
               </a:rPr>
-              <a:t>Fraud and risk detection</a:t>
+              <a:t>Fraud and risk detection (</a:t>
+            </a:r>
+            <a:r>
+              <a:rPr lang="en-US" sz="3600" dirty="0">
+                <a:solidFill>
+                  <a:srgbClr val="00B0F0"/>
+                </a:solidFill>
+              </a:rPr>
+              <a:t>Credit-Cards like VISA</a:t>
+            </a:r>
+            <a:r>
+              <a:rPr lang="en-US" sz="3600" dirty="0">
+                <a:solidFill>
+                  <a:schemeClr val="tx1"/>
+                </a:solidFill>
+              </a:rPr>
+              <a:t>)</a:t>
             </a:r>
           </a:p>
           <a:p>
@@ -34282,7 +34426,23 @@
                   <a:schemeClr val="tx1"/>
                 </a:solidFill>
               </a:rPr>
-              <a:t>Operational efficiency</a:t>
+              <a:t>Operational efficiency (</a:t>
+            </a:r>
+            <a:r>
+              <a:rPr lang="en-US" sz="3600" dirty="0">
+                <a:solidFill>
+                  <a:srgbClr val="00B0F0"/>
+                </a:solidFill>
+              </a:rPr>
+              <a:t>customer services</a:t>
+            </a:r>
+            <a:r>
+              <a:rPr lang="en-US" sz="3600" dirty="0">
+                <a:solidFill>
+                  <a:schemeClr val="tx1"/>
+                </a:solidFill>
+              </a:rPr>
+              <a:t>)</a:t>
             </a:r>
           </a:p>
           <a:p>
@@ -34296,7 +34456,23 @@
                   <a:schemeClr val="tx1"/>
                 </a:solidFill>
               </a:rPr>
-              <a:t>Forecasting and innovation</a:t>
+              <a:t>Forecasting and innovation (</a:t>
+            </a:r>
+            <a:r>
+              <a:rPr lang="en-US" sz="3600" dirty="0">
+                <a:solidFill>
+                  <a:srgbClr val="00B0F0"/>
+                </a:solidFill>
+              </a:rPr>
+              <a:t>Weather data</a:t>
+            </a:r>
+            <a:r>
+              <a:rPr lang="en-US" sz="3600" dirty="0">
+                <a:solidFill>
+                  <a:schemeClr val="tx1"/>
+                </a:solidFill>
+              </a:rPr>
+              <a:t>)</a:t>
             </a:r>
           </a:p>
           <a:p>
@@ -34310,7 +34486,53 @@
                   <a:schemeClr val="tx1"/>
                 </a:solidFill>
               </a:rPr>
-              <a:t>Building AI-LLM models</a:t>
+              <a:t>Building AI-LLM models (</a:t>
+            </a:r>
+            <a:r>
+              <a:rPr lang="en-US" sz="3600" dirty="0">
+                <a:solidFill>
+                  <a:srgbClr val="00B0F0"/>
+                </a:solidFill>
+              </a:rPr>
+              <a:t>like Claude, OpenAI</a:t>
+            </a:r>
+            <a:r>
+              <a:rPr lang="en-US" sz="3600" dirty="0">
+                <a:solidFill>
+                  <a:schemeClr val="tx1"/>
+                </a:solidFill>
+              </a:rPr>
+              <a:t>)</a:t>
+            </a:r>
+          </a:p>
+          <a:p>
+            <a:pPr marL="742950" indent="-742950">
+              <a:buFont typeface="+mj-lt"/>
+              <a:buAutoNum type="arabicPeriod"/>
+            </a:pPr>
+            <a:r>
+              <a:rPr lang="en-US" sz="3600" dirty="0">
+                <a:solidFill>
+                  <a:schemeClr val="tx1"/>
+                </a:solidFill>
+              </a:rPr>
+              <a:t>Building Search Engines (</a:t>
+            </a:r>
+            <a:r>
+              <a:rPr lang="en-US" sz="3600" dirty="0">
+                <a:solidFill>
+                  <a:srgbClr val="00B0F0"/>
+                </a:solidFill>
+              </a:rPr>
+              <a:t>like Google</a:t>
+            </a:r>
+            <a:r>
+              <a:rPr lang="en-US" sz="3600" dirty="0">
+                <a:solidFill>
+                  <a:schemeClr val="tx1"/>
+                </a:solidFill>
+              </a:rPr>
+              <a:t>)</a:t>
             </a:r>
           </a:p>
           <a:p>
@@ -34760,7 +34982,7 @@
                                         <p:tgtEl>
                                           <p:spTgt spid="3">
                                             <p:txEl>
-                                              <p:pRg st="7" end="7"/>
+                                              <p:pRg st="6" end="6"/>
                                             </p:txEl>
                                           </p:spTgt>
                                         </p:tgtEl>
@@ -34810,6 +35032,55 @@
                                           <p:spTgt spid="3">
                                             <p:txEl>
                                               <p:pRg st="8" end="8"/>
+                                            </p:txEl>
+                                          </p:spTgt>
+                                        </p:tgtEl>
+                                        <p:attrNameLst>
+                                          <p:attrName>style.visibility</p:attrName>
+                                        </p:attrNameLst>
+                                      </p:cBhvr>
+                                      <p:to>
+                                        <p:strVal val="visible"/>
+                                      </p:to>
+                                    </p:set>
+                                  </p:childTnLst>
+                                </p:cTn>
+                              </p:par>
+                            </p:childTnLst>
+                          </p:cTn>
+                        </p:par>
+                      </p:childTnLst>
+                    </p:cTn>
+                  </p:par>
+                  <p:par>
+                    <p:cTn id="35" fill="hold">
+                      <p:stCondLst>
+                        <p:cond delay="indefinite"/>
+                      </p:stCondLst>
+                      <p:childTnLst>
+                        <p:par>
+                          <p:cTn id="36" fill="hold">
+                            <p:stCondLst>
+                              <p:cond delay="0"/>
+                            </p:stCondLst>
+                            <p:childTnLst>
+                              <p:par>
+                                <p:cTn id="37" presetID="1" presetClass="entr" presetSubtype="0" fill="hold" nodeType="clickEffect">
+                                  <p:stCondLst>
+                                    <p:cond delay="0"/>
+                                  </p:stCondLst>
+                                  <p:childTnLst>
+                                    <p:set>
+                                      <p:cBhvr>
+                                        <p:cTn id="38" dur="1" fill="hold">
+                                          <p:stCondLst>
+                                            <p:cond delay="0"/>
+                                          </p:stCondLst>
+                                        </p:cTn>
+                                        <p:tgtEl>
+                                          <p:spTgt spid="3">
+                                            <p:txEl>
+                                              <p:pRg st="9" end="9"/>
                                             </p:txEl>
                                           </p:spTgt>
                                         </p:tgtEl>
@@ -34908,7 +35179,35 @@
           <a:p>
             <a:r>
               <a:rPr lang="en-US" sz="3600" dirty="0"/>
-              <a:t>🎯  Query-Driven Schema Design</a:t>
+              <a:t>🎯  </a:t>
+            </a:r>
+            <a:r>
+              <a:rPr lang="en-US" sz="3600" dirty="0">
+                <a:solidFill>
+                  <a:srgbClr val="7030A0"/>
+                </a:solidFill>
+              </a:rPr>
+              <a:t>Query-Driven Schema Design</a:t>
+            </a:r>
+            <a:r>
+              <a:rPr lang="en-US" sz="3600" dirty="0"/>
+              <a:t> </a:t>
+            </a:r>
+            <a:r>
+              <a:rPr lang="en-US" sz="3100" dirty="0"/>
+              <a:t>for</a:t>
+            </a:r>
+            <a:r>
+              <a:rPr lang="en-US" sz="3600" dirty="0"/>
+              <a:t> </a:t>
+            </a:r>
+            <a:r>
+              <a:rPr lang="en-US" sz="3600" dirty="0">
+                <a:solidFill>
+                  <a:srgbClr val="7030A0"/>
+                </a:solidFill>
+              </a:rPr>
+              <a:t>Big Data</a:t>
             </a:r>
           </a:p>
         </p:txBody>
